--- a/doc/基于TunableHNSW的高性能向量搜索研究.pptx
+++ b/doc/基于TunableHNSW的高性能向量搜索研究.pptx
@@ -6,16 +6,22 @@
   </p:sldMasterIdLst>
   <p:sldIdLst>
     <p:sldId id="256" r:id="rId2"/>
-    <p:sldId id="257" r:id="rId3"/>
-    <p:sldId id="258" r:id="rId4"/>
-    <p:sldId id="259" r:id="rId5"/>
-    <p:sldId id="260" r:id="rId6"/>
-    <p:sldId id="261" r:id="rId7"/>
-    <p:sldId id="262" r:id="rId8"/>
-    <p:sldId id="263" r:id="rId9"/>
-    <p:sldId id="264" r:id="rId10"/>
-    <p:sldId id="265" r:id="rId11"/>
-    <p:sldId id="266" r:id="rId12"/>
+    <p:sldId id="267" r:id="rId3"/>
+    <p:sldId id="268" r:id="rId4"/>
+    <p:sldId id="257" r:id="rId5"/>
+    <p:sldId id="258" r:id="rId6"/>
+    <p:sldId id="259" r:id="rId7"/>
+    <p:sldId id="269" r:id="rId8"/>
+    <p:sldId id="260" r:id="rId9"/>
+    <p:sldId id="270" r:id="rId10"/>
+    <p:sldId id="261" r:id="rId11"/>
+    <p:sldId id="262" r:id="rId12"/>
+    <p:sldId id="271" r:id="rId13"/>
+    <p:sldId id="263" r:id="rId14"/>
+    <p:sldId id="264" r:id="rId15"/>
+    <p:sldId id="265" r:id="rId16"/>
+    <p:sldId id="272" r:id="rId17"/>
+    <p:sldId id="266" r:id="rId18"/>
   </p:sldIdLst>
   <p:sldSz cx="12192000" cy="6858000"/>
   <p:notesSz cx="6858000" cy="9144000"/>
@@ -269,7 +275,7 @@
           <a:p>
             <a:fld id="{E0FDA1D6-F75D-4941-9C33-B21505C94443}" type="datetimeFigureOut">
               <a:rPr lang="zh-CN" altLang="en-US" smtClean="0"/>
-              <a:t>2026/1/8</a:t>
+              <a:t>2026/1/9</a:t>
             </a:fld>
             <a:endParaRPr lang="zh-CN" altLang="en-US"/>
           </a:p>
@@ -467,7 +473,7 @@
           <a:p>
             <a:fld id="{E0FDA1D6-F75D-4941-9C33-B21505C94443}" type="datetimeFigureOut">
               <a:rPr lang="zh-CN" altLang="en-US" smtClean="0"/>
-              <a:t>2026/1/8</a:t>
+              <a:t>2026/1/9</a:t>
             </a:fld>
             <a:endParaRPr lang="zh-CN" altLang="en-US"/>
           </a:p>
@@ -675,7 +681,7 @@
           <a:p>
             <a:fld id="{E0FDA1D6-F75D-4941-9C33-B21505C94443}" type="datetimeFigureOut">
               <a:rPr lang="zh-CN" altLang="en-US" smtClean="0"/>
-              <a:t>2026/1/8</a:t>
+              <a:t>2026/1/9</a:t>
             </a:fld>
             <a:endParaRPr lang="zh-CN" altLang="en-US"/>
           </a:p>
@@ -873,7 +879,7 @@
           <a:p>
             <a:fld id="{E0FDA1D6-F75D-4941-9C33-B21505C94443}" type="datetimeFigureOut">
               <a:rPr lang="zh-CN" altLang="en-US" smtClean="0"/>
-              <a:t>2026/1/8</a:t>
+              <a:t>2026/1/9</a:t>
             </a:fld>
             <a:endParaRPr lang="zh-CN" altLang="en-US"/>
           </a:p>
@@ -1148,7 +1154,7 @@
           <a:p>
             <a:fld id="{E0FDA1D6-F75D-4941-9C33-B21505C94443}" type="datetimeFigureOut">
               <a:rPr lang="zh-CN" altLang="en-US" smtClean="0"/>
-              <a:t>2026/1/8</a:t>
+              <a:t>2026/1/9</a:t>
             </a:fld>
             <a:endParaRPr lang="zh-CN" altLang="en-US"/>
           </a:p>
@@ -1413,7 +1419,7 @@
           <a:p>
             <a:fld id="{E0FDA1D6-F75D-4941-9C33-B21505C94443}" type="datetimeFigureOut">
               <a:rPr lang="zh-CN" altLang="en-US" smtClean="0"/>
-              <a:t>2026/1/8</a:t>
+              <a:t>2026/1/9</a:t>
             </a:fld>
             <a:endParaRPr lang="zh-CN" altLang="en-US"/>
           </a:p>
@@ -1825,7 +1831,7 @@
           <a:p>
             <a:fld id="{E0FDA1D6-F75D-4941-9C33-B21505C94443}" type="datetimeFigureOut">
               <a:rPr lang="zh-CN" altLang="en-US" smtClean="0"/>
-              <a:t>2026/1/8</a:t>
+              <a:t>2026/1/9</a:t>
             </a:fld>
             <a:endParaRPr lang="zh-CN" altLang="en-US"/>
           </a:p>
@@ -1966,7 +1972,7 @@
           <a:p>
             <a:fld id="{E0FDA1D6-F75D-4941-9C33-B21505C94443}" type="datetimeFigureOut">
               <a:rPr lang="zh-CN" altLang="en-US" smtClean="0"/>
-              <a:t>2026/1/8</a:t>
+              <a:t>2026/1/9</a:t>
             </a:fld>
             <a:endParaRPr lang="zh-CN" altLang="en-US"/>
           </a:p>
@@ -2079,7 +2085,7 @@
           <a:p>
             <a:fld id="{E0FDA1D6-F75D-4941-9C33-B21505C94443}" type="datetimeFigureOut">
               <a:rPr lang="zh-CN" altLang="en-US" smtClean="0"/>
-              <a:t>2026/1/8</a:t>
+              <a:t>2026/1/9</a:t>
             </a:fld>
             <a:endParaRPr lang="zh-CN" altLang="en-US"/>
           </a:p>
@@ -2390,7 +2396,7 @@
           <a:p>
             <a:fld id="{E0FDA1D6-F75D-4941-9C33-B21505C94443}" type="datetimeFigureOut">
               <a:rPr lang="zh-CN" altLang="en-US" smtClean="0"/>
-              <a:t>2026/1/8</a:t>
+              <a:t>2026/1/9</a:t>
             </a:fld>
             <a:endParaRPr lang="zh-CN" altLang="en-US"/>
           </a:p>
@@ -2678,7 +2684,7 @@
           <a:p>
             <a:fld id="{E0FDA1D6-F75D-4941-9C33-B21505C94443}" type="datetimeFigureOut">
               <a:rPr lang="zh-CN" altLang="en-US" smtClean="0"/>
-              <a:t>2026/1/8</a:t>
+              <a:t>2026/1/9</a:t>
             </a:fld>
             <a:endParaRPr lang="zh-CN" altLang="en-US"/>
           </a:p>
@@ -2919,7 +2925,7 @@
           <a:p>
             <a:fld id="{E0FDA1D6-F75D-4941-9C33-B21505C94443}" type="datetimeFigureOut">
               <a:rPr lang="zh-CN" altLang="en-US" smtClean="0"/>
-              <a:t>2026/1/8</a:t>
+              <a:t>2026/1/9</a:t>
             </a:fld>
             <a:endParaRPr lang="zh-CN" altLang="en-US"/>
           </a:p>
@@ -3360,15 +3366,21 @@
           <a:lstStyle/>
           <a:p>
             <a:r>
-              <a:rPr lang="zh-CN" altLang="en-US" sz="5400" dirty="0"/>
+              <a:rPr lang="zh-CN" altLang="en-US" sz="5400" b="1" dirty="0">
+                <a:latin typeface="+mj-ea"/>
+              </a:rPr>
               <a:t>基于</a:t>
             </a:r>
             <a:r>
-              <a:rPr lang="en-US" altLang="zh-CN" sz="5400" dirty="0" err="1"/>
+              <a:rPr lang="en-US" altLang="zh-CN" sz="5400" b="1" dirty="0" err="1">
+                <a:latin typeface="+mj-ea"/>
+              </a:rPr>
               <a:t>TunableHNSW</a:t>
             </a:r>
             <a:r>
-              <a:rPr lang="zh-CN" altLang="en-US" sz="5400" dirty="0"/>
+              <a:rPr lang="zh-CN" altLang="en-US" sz="5400" b="1" dirty="0">
+                <a:latin typeface="+mj-ea"/>
+              </a:rPr>
               <a:t>的高性能向量搜索研究</a:t>
             </a:r>
           </a:p>
@@ -3447,6 +3459,7 @@
   <p:clrMapOvr>
     <a:masterClrMapping/>
   </p:clrMapOvr>
+  <p:transition spd="med"/>
 </p:sld>
 </file>
 
@@ -3469,10 +3482,10 @@
       </p:grpSpPr>
       <p:sp>
         <p:nvSpPr>
-          <p:cNvPr id="2" name="标题 1">
-            <a:extLst>
-              <a:ext uri="{FF2B5EF4-FFF2-40B4-BE49-F238E27FC236}">
-                <a16:creationId xmlns:a16="http://schemas.microsoft.com/office/drawing/2014/main" id="{6A474A06-C9E3-EA30-47A8-3807599619E6}"/>
+          <p:cNvPr id="2" name="!!2">
+            <a:extLst>
+              <a:ext uri="{FF2B5EF4-FFF2-40B4-BE49-F238E27FC236}">
+                <a16:creationId xmlns:a16="http://schemas.microsoft.com/office/drawing/2014/main" id="{B1F26C06-F0D4-5FE0-D48F-FDE09896F42C}"/>
               </a:ext>
             </a:extLst>
           </p:cNvPr>
@@ -3489,23 +3502,23 @@
           <a:lstStyle/>
           <a:p>
             <a:r>
-              <a:rPr lang="zh-CN" altLang="en-US" dirty="0"/>
-              <a:t>无效或负面优化分析：高层</a:t>
-            </a:r>
-            <a:r>
-              <a:rPr lang="en-US" altLang="zh-CN" dirty="0"/>
+              <a:rPr lang="zh-CN" altLang="en-US" b="1" dirty="0"/>
+              <a:t>有效优化策略：适应性</a:t>
+            </a:r>
+            <a:r>
+              <a:rPr lang="en-US" altLang="zh-CN" b="1" dirty="0"/>
               <a:t>Beam Search</a:t>
             </a:r>
-            <a:endParaRPr lang="zh-CN" altLang="en-US" dirty="0"/>
-          </a:p>
-        </p:txBody>
-      </p:sp>
-      <p:sp>
-        <p:nvSpPr>
-          <p:cNvPr id="3" name="内容占位符 2">
-            <a:extLst>
-              <a:ext uri="{FF2B5EF4-FFF2-40B4-BE49-F238E27FC236}">
-                <a16:creationId xmlns:a16="http://schemas.microsoft.com/office/drawing/2014/main" id="{DD5DAAFE-F95F-C62E-B7F2-7950DE0DE0D7}"/>
+            <a:endParaRPr lang="zh-CN" altLang="en-US" b="1" dirty="0"/>
+          </a:p>
+        </p:txBody>
+      </p:sp>
+      <p:sp>
+        <p:nvSpPr>
+          <p:cNvPr id="3" name="!!3">
+            <a:extLst>
+              <a:ext uri="{FF2B5EF4-FFF2-40B4-BE49-F238E27FC236}">
+                <a16:creationId xmlns:a16="http://schemas.microsoft.com/office/drawing/2014/main" id="{30196CF7-D5DA-3BCB-878F-217DB115AFB3}"/>
               </a:ext>
             </a:extLst>
           </p:cNvPr>
@@ -3523,103 +3536,15 @@
           <a:p>
             <a:r>
               <a:rPr lang="zh-CN" altLang="en-US" dirty="0"/>
-              <a:t>尝试将</a:t>
-            </a:r>
-            <a:r>
-              <a:rPr lang="en-US" altLang="zh-CN" dirty="0"/>
-              <a:t>HNSW</a:t>
-            </a:r>
-            <a:r>
-              <a:rPr lang="zh-CN" altLang="en-US" dirty="0"/>
-              <a:t>上层导航的贪心搜索替换为</a:t>
+              <a:t>引入动态早停机制，不完全使用固定的</a:t>
             </a:r>
             <a:r>
               <a:rPr lang="en-US" altLang="zh-CN" dirty="0" err="1"/>
-              <a:t>ef</a:t>
-            </a:r>
-            <a:r>
-              <a:rPr lang="zh-CN" altLang="en-US" dirty="0"/>
-              <a:t>较小的</a:t>
-            </a:r>
-            <a:r>
-              <a:rPr lang="en-US" altLang="zh-CN" dirty="0"/>
-              <a:t>Beam Search</a:t>
-            </a:r>
-            <a:r>
-              <a:rPr lang="zh-CN" altLang="en-US" dirty="0"/>
-              <a:t>，在进入第</a:t>
-            </a:r>
-            <a:r>
-              <a:rPr lang="en-US" altLang="zh-CN" dirty="0"/>
-              <a:t>0</a:t>
-            </a:r>
-            <a:r>
-              <a:rPr lang="zh-CN" altLang="en-US" dirty="0"/>
-              <a:t>层使从多个</a:t>
-            </a:r>
-            <a:r>
-              <a:rPr lang="en-US" altLang="zh-CN" dirty="0"/>
-              <a:t>Entry Point</a:t>
-            </a:r>
-            <a:r>
-              <a:rPr lang="zh-CN" altLang="en-US" dirty="0"/>
-              <a:t>开始搜索。问题在于：</a:t>
-            </a:r>
-            <a:endParaRPr lang="en-US" altLang="zh-CN" dirty="0"/>
-          </a:p>
-          <a:p>
-            <a:pPr lvl="1"/>
-            <a:r>
-              <a:rPr lang="zh-CN" altLang="en-US" dirty="0"/>
-              <a:t>高层的贪心导航已经可以导航到距离</a:t>
-            </a:r>
-            <a:r>
-              <a:rPr lang="en-US" altLang="zh-CN" dirty="0"/>
-              <a:t>Query</a:t>
-            </a:r>
-            <a:r>
-              <a:rPr lang="zh-CN" altLang="en-US" dirty="0"/>
-              <a:t>很近的向量，使用</a:t>
-            </a:r>
-            <a:r>
-              <a:rPr lang="en-US" altLang="zh-CN" dirty="0"/>
-              <a:t>Beam Search</a:t>
-            </a:r>
-            <a:r>
-              <a:rPr lang="zh-CN" altLang="en-US" dirty="0"/>
-              <a:t>不能引入更优的</a:t>
-            </a:r>
-            <a:r>
-              <a:rPr lang="en-US" altLang="zh-CN" dirty="0"/>
-              <a:t>Entry Point</a:t>
-            </a:r>
-            <a:r>
-              <a:rPr lang="zh-CN" altLang="en-US" dirty="0"/>
-              <a:t>。</a:t>
-            </a:r>
-            <a:endParaRPr lang="en-US" altLang="zh-CN" dirty="0"/>
-          </a:p>
-          <a:p>
-            <a:pPr lvl="1"/>
-            <a:r>
-              <a:rPr lang="zh-CN" altLang="en-US" dirty="0"/>
-              <a:t>高层导航的目的是为了快速逼近</a:t>
-            </a:r>
-            <a:r>
-              <a:rPr lang="en-US" altLang="zh-CN" dirty="0"/>
-              <a:t>Query</a:t>
-            </a:r>
-            <a:r>
-              <a:rPr lang="zh-CN" altLang="en-US" dirty="0"/>
-              <a:t>；而第</a:t>
-            </a:r>
-            <a:r>
-              <a:rPr lang="en-US" altLang="zh-CN" dirty="0"/>
-              <a:t>0</a:t>
-            </a:r>
-            <a:r>
-              <a:rPr lang="zh-CN" altLang="en-US" dirty="0"/>
-              <a:t>层的导航目的使为了找到绝对最优的</a:t>
+              <a:t>EfSearch</a:t>
+            </a:r>
+            <a:r>
+              <a:rPr lang="zh-CN" altLang="en-US" dirty="0"/>
+              <a:t>参数，当前</a:t>
             </a:r>
             <a:r>
               <a:rPr lang="en-US" altLang="zh-CN" dirty="0"/>
@@ -3627,22 +3552,81 @@
             </a:r>
             <a:r>
               <a:rPr lang="zh-CN" altLang="en-US" dirty="0"/>
-              <a:t>个向量，有一个扩散的过程。</a:t>
+              <a:t>个候选点经过一定循环次数都</a:t>
+            </a:r>
+            <a:r>
+              <a:rPr lang="zh-CN" altLang="en-US" b="1" dirty="0"/>
+              <a:t>没有变化</a:t>
+            </a:r>
+            <a:r>
+              <a:rPr lang="zh-CN" altLang="en-US" dirty="0"/>
+              <a:t>时</a:t>
+            </a:r>
+            <a:r>
+              <a:rPr lang="zh-CN" altLang="en-US" b="1" dirty="0"/>
+              <a:t>直接返回</a:t>
+            </a:r>
+            <a:r>
+              <a:rPr lang="zh-CN" altLang="en-US" dirty="0"/>
+              <a:t>这</a:t>
+            </a:r>
+            <a:r>
+              <a:rPr lang="en-US" altLang="zh-CN" dirty="0"/>
+              <a:t>10</a:t>
+            </a:r>
+            <a:r>
+              <a:rPr lang="zh-CN" altLang="en-US" dirty="0"/>
+              <a:t>个后选点。</a:t>
             </a:r>
             <a:endParaRPr lang="en-US" altLang="zh-CN" dirty="0"/>
+          </a:p>
+          <a:p>
+            <a:r>
+              <a:rPr lang="zh-CN" altLang="en-US" dirty="0"/>
+              <a:t>搜索延时提升</a:t>
+            </a:r>
+            <a:r>
+              <a:rPr lang="en-US" altLang="zh-CN" dirty="0"/>
+              <a:t>~</a:t>
+            </a:r>
+            <a:r>
+              <a:rPr lang="en-US" altLang="zh-CN" b="1" dirty="0">
+                <a:solidFill>
+                  <a:srgbClr val="C00000"/>
+                </a:solidFill>
+              </a:rPr>
+              <a:t>-10%</a:t>
+            </a:r>
+            <a:endParaRPr lang="zh-CN" altLang="en-US" b="1" dirty="0">
+              <a:solidFill>
+                <a:srgbClr val="C00000"/>
+              </a:solidFill>
+            </a:endParaRPr>
           </a:p>
         </p:txBody>
       </p:sp>
     </p:spTree>
     <p:extLst>
       <p:ext uri="{BB962C8B-B14F-4D97-AF65-F5344CB8AC3E}">
-        <p14:creationId xmlns:p14="http://schemas.microsoft.com/office/powerpoint/2010/main" val="774190148"/>
+        <p14:creationId xmlns:p14="http://schemas.microsoft.com/office/powerpoint/2010/main" val="26189235"/>
       </p:ext>
     </p:extLst>
   </p:cSld>
   <p:clrMapOvr>
     <a:masterClrMapping/>
   </p:clrMapOvr>
+  <mc:AlternateContent xmlns:mc="http://schemas.openxmlformats.org/markup-compatibility/2006">
+    <mc:Choice xmlns:p159="http://schemas.microsoft.com/office/powerpoint/2015/09/main" Requires="p159">
+      <p:transition spd="med">
+        <p159:morph option="byWord"/>
+      </p:transition>
+    </mc:Choice>
+    <mc:Fallback>
+      <p:transition spd="med">
+        <p:fade/>
+      </p:transition>
+    </mc:Fallback>
+  </mc:AlternateContent>
 </p:sld>
 </file>
 
@@ -3665,10 +3649,10 @@
       </p:grpSpPr>
       <p:sp>
         <p:nvSpPr>
-          <p:cNvPr id="2" name="标题 1">
-            <a:extLst>
-              <a:ext uri="{FF2B5EF4-FFF2-40B4-BE49-F238E27FC236}">
-                <a16:creationId xmlns:a16="http://schemas.microsoft.com/office/drawing/2014/main" id="{B3BC6E61-D740-72C1-85EE-D9960D2642BE}"/>
+          <p:cNvPr id="2" name="!!2_">
+            <a:extLst>
+              <a:ext uri="{FF2B5EF4-FFF2-40B4-BE49-F238E27FC236}">
+                <a16:creationId xmlns:a16="http://schemas.microsoft.com/office/drawing/2014/main" id="{48899C13-3942-DDEE-9034-D2ECE98736DE}"/>
               </a:ext>
             </a:extLst>
           </p:cNvPr>
@@ -3685,8 +3669,1256 @@
           <a:lstStyle/>
           <a:p>
             <a:r>
-              <a:rPr lang="zh-CN" altLang="en-US" dirty="0"/>
+              <a:rPr lang="zh-CN" altLang="en-US" b="1" dirty="0"/>
+              <a:t>有效优化策略：</a:t>
+            </a:r>
+            <a:r>
+              <a:rPr lang="en-US" altLang="zh-CN" b="1" dirty="0"/>
+              <a:t>std::</a:t>
+            </a:r>
+            <a:r>
+              <a:rPr lang="en-US" altLang="zh-CN" b="1" dirty="0" err="1"/>
+              <a:t>pmr</a:t>
+            </a:r>
+            <a:r>
+              <a:rPr lang="zh-CN" altLang="en-US" b="1" dirty="0"/>
+              <a:t>内存布局优化</a:t>
+            </a:r>
+          </a:p>
+        </p:txBody>
+      </p:sp>
+      <p:sp>
+        <p:nvSpPr>
+          <p:cNvPr id="3" name="!!3">
+            <a:extLst>
+              <a:ext uri="{FF2B5EF4-FFF2-40B4-BE49-F238E27FC236}">
+                <a16:creationId xmlns:a16="http://schemas.microsoft.com/office/drawing/2014/main" id="{36FA0ED1-BC9A-A150-3E93-56B0867FF8B2}"/>
+              </a:ext>
+            </a:extLst>
+          </p:cNvPr>
+          <p:cNvSpPr>
+            <a:spLocks noGrp="1"/>
+          </p:cNvSpPr>
+          <p:nvPr>
+            <p:ph idx="1"/>
+          </p:nvPr>
+        </p:nvSpPr>
+        <p:spPr/>
+        <p:txBody>
+          <a:bodyPr/>
+          <a:lstStyle/>
+          <a:p>
+            <a:r>
+              <a:rPr lang="zh-CN" altLang="en-US" dirty="0"/>
+              <a:t>使用</a:t>
+            </a:r>
+            <a:r>
+              <a:rPr lang="en-US" altLang="zh-CN" dirty="0"/>
+              <a:t>std::</a:t>
+            </a:r>
+            <a:r>
+              <a:rPr lang="en-US" altLang="zh-CN" dirty="0" err="1"/>
+              <a:t>pmr</a:t>
+            </a:r>
+            <a:r>
+              <a:rPr lang="en-US" altLang="zh-CN" dirty="0"/>
+              <a:t>::</a:t>
+            </a:r>
+            <a:r>
+              <a:rPr lang="en-US" altLang="zh-CN" dirty="0" err="1"/>
+              <a:t>synchronized_pool_resource</a:t>
+            </a:r>
+            <a:r>
+              <a:rPr lang="zh-CN" altLang="en-US" dirty="0"/>
+              <a:t>替代默认的系统堆内存分配，提高</a:t>
+            </a:r>
+            <a:r>
+              <a:rPr lang="zh-CN" altLang="en-US" b="1" dirty="0"/>
+              <a:t>申请内存</a:t>
+            </a:r>
+            <a:r>
+              <a:rPr lang="zh-CN" altLang="en-US" dirty="0"/>
+              <a:t>速度和内存</a:t>
+            </a:r>
+            <a:r>
+              <a:rPr lang="zh-CN" altLang="en-US" b="1" dirty="0"/>
+              <a:t>局部性</a:t>
+            </a:r>
+            <a:r>
+              <a:rPr lang="zh-CN" altLang="en-US" dirty="0"/>
+              <a:t>。</a:t>
+            </a:r>
+            <a:endParaRPr lang="en-US" altLang="zh-CN" dirty="0"/>
+          </a:p>
+          <a:p>
+            <a:r>
+              <a:rPr lang="zh-CN" altLang="en-US" dirty="0"/>
+              <a:t>总体搜索延时提升</a:t>
+            </a:r>
+            <a:r>
+              <a:rPr lang="en-US" altLang="zh-CN" dirty="0"/>
+              <a:t>~</a:t>
+            </a:r>
+            <a:r>
+              <a:rPr lang="en-US" altLang="zh-CN" b="1" dirty="0">
+                <a:solidFill>
+                  <a:srgbClr val="C00000"/>
+                </a:solidFill>
+              </a:rPr>
+              <a:t>-30%</a:t>
+            </a:r>
+            <a:endParaRPr lang="zh-CN" altLang="en-US" b="1" dirty="0">
+              <a:solidFill>
+                <a:srgbClr val="C00000"/>
+              </a:solidFill>
+            </a:endParaRPr>
+          </a:p>
+        </p:txBody>
+      </p:sp>
+    </p:spTree>
+    <p:extLst>
+      <p:ext uri="{BB962C8B-B14F-4D97-AF65-F5344CB8AC3E}">
+        <p14:creationId xmlns:p14="http://schemas.microsoft.com/office/powerpoint/2010/main" val="957927078"/>
+      </p:ext>
+    </p:extLst>
+  </p:cSld>
+  <p:clrMapOvr>
+    <a:masterClrMapping/>
+  </p:clrMapOvr>
+  <mc:AlternateContent xmlns:mc="http://schemas.openxmlformats.org/markup-compatibility/2006">
+    <mc:Choice xmlns:p159="http://schemas.microsoft.com/office/powerpoint/2015/09/main" Requires="p159">
+      <p:transition spd="med">
+        <p159:morph option="byWord"/>
+      </p:transition>
+    </mc:Choice>
+    <mc:Fallback>
+      <p:transition spd="med">
+        <p:fade/>
+      </p:transition>
+    </mc:Fallback>
+  </mc:AlternateContent>
+</p:sld>
+</file>
+
+<file path=ppt/slides/slide12.xml><?xml version="1.0" encoding="utf-8"?>
+<p:sld xmlns:a="http://schemas.openxmlformats.org/drawingml/2006/main" xmlns:r="http://schemas.openxmlformats.org/officeDocument/2006/relationships" xmlns:p="http://schemas.openxmlformats.org/presentationml/2006/main">
+  <p:cSld>
+    <p:spTree>
+      <p:nvGrpSpPr>
+        <p:cNvPr id="1" name=""/>
+        <p:cNvGrpSpPr/>
+        <p:nvPr/>
+      </p:nvGrpSpPr>
+      <p:grpSpPr>
+        <a:xfrm>
+          <a:off x="0" y="0"/>
+          <a:ext cx="0" cy="0"/>
+          <a:chOff x="0" y="0"/>
+          <a:chExt cx="0" cy="0"/>
+        </a:xfrm>
+      </p:grpSpPr>
+      <p:sp>
+        <p:nvSpPr>
+          <p:cNvPr id="2" name="!!1">
+            <a:extLst>
+              <a:ext uri="{FF2B5EF4-FFF2-40B4-BE49-F238E27FC236}">
+                <a16:creationId xmlns:a16="http://schemas.microsoft.com/office/drawing/2014/main" id="{606D64F5-746E-4BAA-3001-BF7BB16D2D90}"/>
+              </a:ext>
+            </a:extLst>
+          </p:cNvPr>
+          <p:cNvSpPr>
+            <a:spLocks noGrp="1"/>
+          </p:cNvSpPr>
+          <p:nvPr>
+            <p:ph type="title"/>
+          </p:nvPr>
+        </p:nvSpPr>
+        <p:spPr/>
+        <p:txBody>
+          <a:bodyPr/>
+          <a:lstStyle/>
+          <a:p>
+            <a:r>
+              <a:rPr lang="zh-CN" altLang="en-US" b="1" dirty="0"/>
+              <a:t>无效或负面优化</a:t>
+            </a:r>
+          </a:p>
+        </p:txBody>
+      </p:sp>
+      <p:sp>
+        <p:nvSpPr>
+          <p:cNvPr id="3" name="!!2">
+            <a:extLst>
+              <a:ext uri="{FF2B5EF4-FFF2-40B4-BE49-F238E27FC236}">
+                <a16:creationId xmlns:a16="http://schemas.microsoft.com/office/drawing/2014/main" id="{0878EDE0-B464-B9D2-0D85-737A1BB4D934}"/>
+              </a:ext>
+            </a:extLst>
+          </p:cNvPr>
+          <p:cNvSpPr>
+            <a:spLocks noGrp="1"/>
+          </p:cNvSpPr>
+          <p:nvPr>
+            <p:ph type="body" idx="1"/>
+          </p:nvPr>
+        </p:nvSpPr>
+        <p:spPr>
+          <a:xfrm>
+            <a:off x="831850" y="4589463"/>
+            <a:ext cx="10515600" cy="439737"/>
+          </a:xfrm>
+        </p:spPr>
+        <p:txBody>
+          <a:bodyPr/>
+          <a:lstStyle/>
+          <a:p>
+            <a:pPr marL="342900" indent="-342900">
+              <a:buFont typeface="Arial" panose="020B0604020202020204" pitchFamily="34" charset="0"/>
+              <a:buChar char="•"/>
+            </a:pPr>
+            <a:r>
+              <a:rPr lang="zh-CN" altLang="en-US" dirty="0"/>
+              <a:t>量化</a:t>
+            </a:r>
+            <a:endParaRPr lang="en-US" altLang="zh-CN" dirty="0"/>
+          </a:p>
+        </p:txBody>
+      </p:sp>
+      <p:sp>
+        <p:nvSpPr>
+          <p:cNvPr id="4" name="!!">
+            <a:extLst>
+              <a:ext uri="{FF2B5EF4-FFF2-40B4-BE49-F238E27FC236}">
+                <a16:creationId xmlns:a16="http://schemas.microsoft.com/office/drawing/2014/main" id="{82F5890D-513F-AFA9-A3CD-2327651F00B2}"/>
+              </a:ext>
+            </a:extLst>
+          </p:cNvPr>
+          <p:cNvSpPr txBox="1">
+            <a:spLocks/>
+          </p:cNvSpPr>
+          <p:nvPr/>
+        </p:nvSpPr>
+        <p:spPr>
+          <a:xfrm>
+            <a:off x="838200" y="5029200"/>
+            <a:ext cx="10515600" cy="1500187"/>
+          </a:xfrm>
+          <a:prstGeom prst="rect">
+            <a:avLst/>
+          </a:prstGeom>
+        </p:spPr>
+        <p:txBody>
+          <a:bodyPr vert="horz" lIns="91440" tIns="45720" rIns="91440" bIns="45720" rtlCol="0">
+            <a:normAutofit/>
+          </a:bodyPr>
+          <a:lstStyle>
+            <a:lvl1pPr marL="0" indent="0" algn="l" defTabSz="914400" rtl="0" eaLnBrk="1" latinLnBrk="0" hangingPunct="1">
+              <a:lnSpc>
+                <a:spcPct val="90000"/>
+              </a:lnSpc>
+              <a:spcBef>
+                <a:spcPts val="1000"/>
+              </a:spcBef>
+              <a:buFont typeface="Arial" panose="020B0604020202020204" pitchFamily="34" charset="0"/>
+              <a:buNone/>
+              <a:defRPr sz="2400" kern="1200">
+                <a:solidFill>
+                  <a:schemeClr val="tx1">
+                    <a:tint val="75000"/>
+                  </a:schemeClr>
+                </a:solidFill>
+                <a:latin typeface="+mn-lt"/>
+                <a:ea typeface="+mn-ea"/>
+                <a:cs typeface="+mn-cs"/>
+              </a:defRPr>
+            </a:lvl1pPr>
+            <a:lvl2pPr marL="457200" indent="0" algn="l" defTabSz="914400" rtl="0" eaLnBrk="1" latinLnBrk="0" hangingPunct="1">
+              <a:lnSpc>
+                <a:spcPct val="90000"/>
+              </a:lnSpc>
+              <a:spcBef>
+                <a:spcPts val="500"/>
+              </a:spcBef>
+              <a:buFont typeface="Arial" panose="020B0604020202020204" pitchFamily="34" charset="0"/>
+              <a:buNone/>
+              <a:defRPr sz="2000" kern="1200">
+                <a:solidFill>
+                  <a:schemeClr val="tx1">
+                    <a:tint val="75000"/>
+                  </a:schemeClr>
+                </a:solidFill>
+                <a:latin typeface="+mn-lt"/>
+                <a:ea typeface="+mn-ea"/>
+                <a:cs typeface="+mn-cs"/>
+              </a:defRPr>
+            </a:lvl2pPr>
+            <a:lvl3pPr marL="914400" indent="0" algn="l" defTabSz="914400" rtl="0" eaLnBrk="1" latinLnBrk="0" hangingPunct="1">
+              <a:lnSpc>
+                <a:spcPct val="90000"/>
+              </a:lnSpc>
+              <a:spcBef>
+                <a:spcPts val="500"/>
+              </a:spcBef>
+              <a:buFont typeface="Arial" panose="020B0604020202020204" pitchFamily="34" charset="0"/>
+              <a:buNone/>
+              <a:defRPr sz="1800" kern="1200">
+                <a:solidFill>
+                  <a:schemeClr val="tx1">
+                    <a:tint val="75000"/>
+                  </a:schemeClr>
+                </a:solidFill>
+                <a:latin typeface="+mn-lt"/>
+                <a:ea typeface="+mn-ea"/>
+                <a:cs typeface="+mn-cs"/>
+              </a:defRPr>
+            </a:lvl3pPr>
+            <a:lvl4pPr marL="1371600" indent="0" algn="l" defTabSz="914400" rtl="0" eaLnBrk="1" latinLnBrk="0" hangingPunct="1">
+              <a:lnSpc>
+                <a:spcPct val="90000"/>
+              </a:lnSpc>
+              <a:spcBef>
+                <a:spcPts val="500"/>
+              </a:spcBef>
+              <a:buFont typeface="Arial" panose="020B0604020202020204" pitchFamily="34" charset="0"/>
+              <a:buNone/>
+              <a:defRPr sz="1600" kern="1200">
+                <a:solidFill>
+                  <a:schemeClr val="tx1">
+                    <a:tint val="75000"/>
+                  </a:schemeClr>
+                </a:solidFill>
+                <a:latin typeface="+mn-lt"/>
+                <a:ea typeface="+mn-ea"/>
+                <a:cs typeface="+mn-cs"/>
+              </a:defRPr>
+            </a:lvl4pPr>
+            <a:lvl5pPr marL="1828800" indent="0" algn="l" defTabSz="914400" rtl="0" eaLnBrk="1" latinLnBrk="0" hangingPunct="1">
+              <a:lnSpc>
+                <a:spcPct val="90000"/>
+              </a:lnSpc>
+              <a:spcBef>
+                <a:spcPts val="500"/>
+              </a:spcBef>
+              <a:buFont typeface="Arial" panose="020B0604020202020204" pitchFamily="34" charset="0"/>
+              <a:buNone/>
+              <a:defRPr sz="1600" kern="1200">
+                <a:solidFill>
+                  <a:schemeClr val="tx1">
+                    <a:tint val="75000"/>
+                  </a:schemeClr>
+                </a:solidFill>
+                <a:latin typeface="+mn-lt"/>
+                <a:ea typeface="+mn-ea"/>
+                <a:cs typeface="+mn-cs"/>
+              </a:defRPr>
+            </a:lvl5pPr>
+            <a:lvl6pPr marL="2286000" indent="0" algn="l" defTabSz="914400" rtl="0" eaLnBrk="1" latinLnBrk="0" hangingPunct="1">
+              <a:lnSpc>
+                <a:spcPct val="90000"/>
+              </a:lnSpc>
+              <a:spcBef>
+                <a:spcPts val="500"/>
+              </a:spcBef>
+              <a:buFont typeface="Arial" panose="020B0604020202020204" pitchFamily="34" charset="0"/>
+              <a:buNone/>
+              <a:defRPr sz="1600" kern="1200">
+                <a:solidFill>
+                  <a:schemeClr val="tx1">
+                    <a:tint val="75000"/>
+                  </a:schemeClr>
+                </a:solidFill>
+                <a:latin typeface="+mn-lt"/>
+                <a:ea typeface="+mn-ea"/>
+                <a:cs typeface="+mn-cs"/>
+              </a:defRPr>
+            </a:lvl6pPr>
+            <a:lvl7pPr marL="2743200" indent="0" algn="l" defTabSz="914400" rtl="0" eaLnBrk="1" latinLnBrk="0" hangingPunct="1">
+              <a:lnSpc>
+                <a:spcPct val="90000"/>
+              </a:lnSpc>
+              <a:spcBef>
+                <a:spcPts val="500"/>
+              </a:spcBef>
+              <a:buFont typeface="Arial" panose="020B0604020202020204" pitchFamily="34" charset="0"/>
+              <a:buNone/>
+              <a:defRPr sz="1600" kern="1200">
+                <a:solidFill>
+                  <a:schemeClr val="tx1">
+                    <a:tint val="75000"/>
+                  </a:schemeClr>
+                </a:solidFill>
+                <a:latin typeface="+mn-lt"/>
+                <a:ea typeface="+mn-ea"/>
+                <a:cs typeface="+mn-cs"/>
+              </a:defRPr>
+            </a:lvl7pPr>
+            <a:lvl8pPr marL="3200400" indent="0" algn="l" defTabSz="914400" rtl="0" eaLnBrk="1" latinLnBrk="0" hangingPunct="1">
+              <a:lnSpc>
+                <a:spcPct val="90000"/>
+              </a:lnSpc>
+              <a:spcBef>
+                <a:spcPts val="500"/>
+              </a:spcBef>
+              <a:buFont typeface="Arial" panose="020B0604020202020204" pitchFamily="34" charset="0"/>
+              <a:buNone/>
+              <a:defRPr sz="1600" kern="1200">
+                <a:solidFill>
+                  <a:schemeClr val="tx1">
+                    <a:tint val="75000"/>
+                  </a:schemeClr>
+                </a:solidFill>
+                <a:latin typeface="+mn-lt"/>
+                <a:ea typeface="+mn-ea"/>
+                <a:cs typeface="+mn-cs"/>
+              </a:defRPr>
+            </a:lvl8pPr>
+            <a:lvl9pPr marL="3657600" indent="0" algn="l" defTabSz="914400" rtl="0" eaLnBrk="1" latinLnBrk="0" hangingPunct="1">
+              <a:lnSpc>
+                <a:spcPct val="90000"/>
+              </a:lnSpc>
+              <a:spcBef>
+                <a:spcPts val="500"/>
+              </a:spcBef>
+              <a:buFont typeface="Arial" panose="020B0604020202020204" pitchFamily="34" charset="0"/>
+              <a:buNone/>
+              <a:defRPr sz="1600" kern="1200">
+                <a:solidFill>
+                  <a:schemeClr val="tx1">
+                    <a:tint val="75000"/>
+                  </a:schemeClr>
+                </a:solidFill>
+                <a:latin typeface="+mn-lt"/>
+                <a:ea typeface="+mn-ea"/>
+                <a:cs typeface="+mn-cs"/>
+              </a:defRPr>
+            </a:lvl9pPr>
+          </a:lstStyle>
+          <a:p>
+            <a:pPr marL="342900" indent="-342900">
+              <a:buFont typeface="Arial" panose="020B0604020202020204" pitchFamily="34" charset="0"/>
+              <a:buChar char="•"/>
+            </a:pPr>
+            <a:r>
+              <a:rPr lang="zh-CN" altLang="en-US" dirty="0"/>
+              <a:t>倒排文件索引</a:t>
+            </a:r>
+            <a:endParaRPr lang="en-US" altLang="zh-CN" dirty="0"/>
+          </a:p>
+          <a:p>
+            <a:pPr marL="342900" indent="-342900">
+              <a:buFont typeface="Arial" panose="020B0604020202020204" pitchFamily="34" charset="0"/>
+              <a:buChar char="•"/>
+            </a:pPr>
+            <a:r>
+              <a:rPr lang="zh-CN" altLang="en-US" dirty="0"/>
+              <a:t>高层</a:t>
+            </a:r>
+            <a:r>
+              <a:rPr lang="en-US" altLang="zh-CN" dirty="0" err="1"/>
+              <a:t>BeamSearch</a:t>
+            </a:r>
+            <a:endParaRPr lang="zh-CN" altLang="en-US" dirty="0"/>
+          </a:p>
+        </p:txBody>
+      </p:sp>
+    </p:spTree>
+    <p:extLst>
+      <p:ext uri="{BB962C8B-B14F-4D97-AF65-F5344CB8AC3E}">
+        <p14:creationId xmlns:p14="http://schemas.microsoft.com/office/powerpoint/2010/main" val="4253219032"/>
+      </p:ext>
+    </p:extLst>
+  </p:cSld>
+  <p:clrMapOvr>
+    <a:masterClrMapping/>
+  </p:clrMapOvr>
+  <p:transition spd="med">
+    <p:fade/>
+  </p:transition>
+</p:sld>
+</file>
+
+<file path=ppt/slides/slide13.xml><?xml version="1.0" encoding="utf-8"?>
+<p:sld xmlns:a="http://schemas.openxmlformats.org/drawingml/2006/main" xmlns:r="http://schemas.openxmlformats.org/officeDocument/2006/relationships" xmlns:p="http://schemas.openxmlformats.org/presentationml/2006/main">
+  <p:cSld>
+    <p:spTree>
+      <p:nvGrpSpPr>
+        <p:cNvPr id="1" name=""/>
+        <p:cNvGrpSpPr/>
+        <p:nvPr/>
+      </p:nvGrpSpPr>
+      <p:grpSpPr>
+        <a:xfrm>
+          <a:off x="0" y="0"/>
+          <a:ext cx="0" cy="0"/>
+          <a:chOff x="0" y="0"/>
+          <a:chExt cx="0" cy="0"/>
+        </a:xfrm>
+      </p:grpSpPr>
+      <p:sp>
+        <p:nvSpPr>
+          <p:cNvPr id="2" name="!!2">
+            <a:extLst>
+              <a:ext uri="{FF2B5EF4-FFF2-40B4-BE49-F238E27FC236}">
+                <a16:creationId xmlns:a16="http://schemas.microsoft.com/office/drawing/2014/main" id="{BA09528C-337C-E805-A4DB-C02A3026B1A5}"/>
+              </a:ext>
+            </a:extLst>
+          </p:cNvPr>
+          <p:cNvSpPr>
+            <a:spLocks noGrp="1"/>
+          </p:cNvSpPr>
+          <p:nvPr>
+            <p:ph type="title"/>
+          </p:nvPr>
+        </p:nvSpPr>
+        <p:spPr/>
+        <p:txBody>
+          <a:bodyPr/>
+          <a:lstStyle/>
+          <a:p>
+            <a:r>
+              <a:rPr lang="zh-CN" altLang="en-US" b="1" dirty="0"/>
+              <a:t>无效或负面优化：量化（</a:t>
+            </a:r>
+            <a:r>
+              <a:rPr lang="en-US" altLang="zh-CN" b="1" dirty="0"/>
+              <a:t>PQ</a:t>
+            </a:r>
+            <a:r>
+              <a:rPr lang="zh-CN" altLang="en-US" b="1" dirty="0"/>
+              <a:t>，</a:t>
+            </a:r>
+            <a:r>
+              <a:rPr lang="en-US" altLang="zh-CN" b="1" dirty="0"/>
+              <a:t>OPQ</a:t>
+            </a:r>
+            <a:r>
+              <a:rPr lang="zh-CN" altLang="en-US" b="1" dirty="0"/>
+              <a:t>，</a:t>
+            </a:r>
+            <a:r>
+              <a:rPr lang="en-US" altLang="zh-CN" b="1" dirty="0"/>
+              <a:t>SQ</a:t>
+            </a:r>
+            <a:r>
+              <a:rPr lang="zh-CN" altLang="en-US" b="1" dirty="0"/>
+              <a:t>）</a:t>
+            </a:r>
+          </a:p>
+        </p:txBody>
+      </p:sp>
+      <p:sp>
+        <p:nvSpPr>
+          <p:cNvPr id="3" name="内容占位符 2">
+            <a:extLst>
+              <a:ext uri="{FF2B5EF4-FFF2-40B4-BE49-F238E27FC236}">
+                <a16:creationId xmlns:a16="http://schemas.microsoft.com/office/drawing/2014/main" id="{2723A2E7-A0EA-CCB9-72D4-6BD6B3C4C70A}"/>
+              </a:ext>
+            </a:extLst>
+          </p:cNvPr>
+          <p:cNvSpPr>
+            <a:spLocks noGrp="1"/>
+          </p:cNvSpPr>
+          <p:nvPr>
+            <p:ph idx="1"/>
+          </p:nvPr>
+        </p:nvSpPr>
+        <p:spPr/>
+        <p:txBody>
+          <a:bodyPr/>
+          <a:lstStyle/>
+          <a:p>
+            <a:r>
+              <a:rPr lang="en-US" altLang="zh-CN" dirty="0"/>
+              <a:t>PQ</a:t>
+            </a:r>
+            <a:r>
+              <a:rPr lang="zh-CN" altLang="en-US" dirty="0"/>
+              <a:t>和</a:t>
+            </a:r>
+            <a:r>
+              <a:rPr lang="en-US" altLang="zh-CN" dirty="0"/>
+              <a:t>OPQ</a:t>
+            </a:r>
+            <a:r>
+              <a:rPr lang="zh-CN" altLang="en-US" dirty="0"/>
+              <a:t>优化即使增加</a:t>
+            </a:r>
+            <a:r>
+              <a:rPr lang="en-US" altLang="zh-CN" dirty="0" err="1"/>
+              <a:t>rerank</a:t>
+            </a:r>
+            <a:r>
+              <a:rPr lang="zh-CN" altLang="en-US" dirty="0"/>
+              <a:t>步骤都使搜索精度大幅下降。</a:t>
+            </a:r>
+            <a:endParaRPr lang="en-US" altLang="zh-CN" dirty="0"/>
+          </a:p>
+          <a:p>
+            <a:pPr lvl="1"/>
+            <a:r>
+              <a:rPr lang="zh-CN" altLang="en-US" dirty="0"/>
+              <a:t>根据</a:t>
+            </a:r>
+            <a:r>
+              <a:rPr lang="en-US" altLang="zh-CN" b="1" dirty="0">
+                <a:solidFill>
+                  <a:srgbClr val="002060"/>
+                </a:solidFill>
+              </a:rPr>
+              <a:t>Johnson-</a:t>
+            </a:r>
+            <a:r>
+              <a:rPr lang="en-US" altLang="zh-CN" b="1" dirty="0" err="1">
+                <a:solidFill>
+                  <a:srgbClr val="002060"/>
+                </a:solidFill>
+              </a:rPr>
+              <a:t>Lindenstrauss</a:t>
+            </a:r>
+            <a:r>
+              <a:rPr lang="zh-CN" altLang="en-US" b="1" dirty="0">
+                <a:solidFill>
+                  <a:srgbClr val="002060"/>
+                </a:solidFill>
+              </a:rPr>
+              <a:t>引理</a:t>
+            </a:r>
+            <a:r>
+              <a:rPr lang="zh-CN" altLang="en-US" dirty="0"/>
+              <a:t>可以计算得所有维度压缩得量化方法在</a:t>
+            </a:r>
+            <a:r>
+              <a:rPr lang="en-US" altLang="zh-CN" dirty="0"/>
+              <a:t>SIFT-1m</a:t>
+            </a:r>
+            <a:r>
+              <a:rPr lang="zh-CN" altLang="en-US" dirty="0"/>
+              <a:t>和</a:t>
+            </a:r>
+            <a:r>
+              <a:rPr lang="en-US" altLang="zh-CN" dirty="0" err="1"/>
+              <a:t>GloVe</a:t>
+            </a:r>
+            <a:r>
+              <a:rPr lang="zh-CN" altLang="en-US" dirty="0"/>
+              <a:t>数据集上有损失上界</a:t>
+            </a:r>
+            <a:r>
+              <a:rPr lang="en-US" altLang="zh-CN" b="1" dirty="0">
+                <a:solidFill>
+                  <a:srgbClr val="002060"/>
+                </a:solidFill>
+              </a:rPr>
+              <a:t>92%</a:t>
+            </a:r>
+            <a:r>
+              <a:rPr lang="zh-CN" altLang="en-US" dirty="0"/>
+              <a:t>和</a:t>
+            </a:r>
+            <a:r>
+              <a:rPr lang="en-US" altLang="zh-CN" b="1" dirty="0">
+                <a:solidFill>
+                  <a:srgbClr val="002060"/>
+                </a:solidFill>
+              </a:rPr>
+              <a:t>106%</a:t>
+            </a:r>
+            <a:r>
+              <a:rPr lang="zh-CN" altLang="en-US" dirty="0"/>
+              <a:t>。</a:t>
+            </a:r>
+            <a:endParaRPr lang="en-US" altLang="zh-CN" dirty="0"/>
+          </a:p>
+          <a:p>
+            <a:pPr lvl="1"/>
+            <a:r>
+              <a:rPr lang="zh-CN" altLang="en-US" dirty="0"/>
+              <a:t>搜索性能损失</a:t>
+            </a:r>
+            <a:r>
+              <a:rPr lang="en-US" altLang="zh-CN" dirty="0"/>
+              <a:t>~</a:t>
+            </a:r>
+            <a:r>
+              <a:rPr lang="en-US" altLang="zh-CN" b="1" dirty="0">
+                <a:solidFill>
+                  <a:srgbClr val="C00000"/>
+                </a:solidFill>
+              </a:rPr>
+              <a:t>+40%</a:t>
+            </a:r>
+          </a:p>
+          <a:p>
+            <a:r>
+              <a:rPr lang="en-US" altLang="zh-CN" dirty="0"/>
+              <a:t>SQ16</a:t>
+            </a:r>
+            <a:r>
+              <a:rPr lang="zh-CN" altLang="en-US" dirty="0"/>
+              <a:t>量化对搜索精度没有显著影响，延时增加</a:t>
+            </a:r>
+            <a:r>
+              <a:rPr lang="en-US" altLang="zh-CN" dirty="0"/>
+              <a:t>~</a:t>
+            </a:r>
+            <a:r>
+              <a:rPr lang="en-US" altLang="zh-CN" b="1" dirty="0">
+                <a:solidFill>
+                  <a:srgbClr val="C00000"/>
+                </a:solidFill>
+              </a:rPr>
+              <a:t>+200%</a:t>
+            </a:r>
+            <a:r>
+              <a:rPr lang="zh-CN" altLang="en-US" dirty="0"/>
+              <a:t>。</a:t>
+            </a:r>
+            <a:endParaRPr lang="en-US" altLang="zh-CN" dirty="0"/>
+          </a:p>
+        </p:txBody>
+      </p:sp>
+    </p:spTree>
+    <p:extLst>
+      <p:ext uri="{BB962C8B-B14F-4D97-AF65-F5344CB8AC3E}">
+        <p14:creationId xmlns:p14="http://schemas.microsoft.com/office/powerpoint/2010/main" val="2012672098"/>
+      </p:ext>
+    </p:extLst>
+  </p:cSld>
+  <p:clrMapOvr>
+    <a:masterClrMapping/>
+  </p:clrMapOvr>
+  <mc:AlternateContent xmlns:mc="http://schemas.openxmlformats.org/markup-compatibility/2006">
+    <mc:Choice xmlns:p159="http://schemas.microsoft.com/office/powerpoint/2015/09/main" Requires="p159">
+      <p:transition spd="med">
+        <p159:morph option="byObject"/>
+      </p:transition>
+    </mc:Choice>
+    <mc:Fallback>
+      <p:transition spd="med">
+        <p:fade/>
+      </p:transition>
+    </mc:Fallback>
+  </mc:AlternateContent>
+</p:sld>
+</file>
+
+<file path=ppt/slides/slide14.xml><?xml version="1.0" encoding="utf-8"?>
+<p:sld xmlns:a="http://schemas.openxmlformats.org/drawingml/2006/main" xmlns:r="http://schemas.openxmlformats.org/officeDocument/2006/relationships" xmlns:p="http://schemas.openxmlformats.org/presentationml/2006/main">
+  <p:cSld>
+    <p:spTree>
+      <p:nvGrpSpPr>
+        <p:cNvPr id="1" name=""/>
+        <p:cNvGrpSpPr/>
+        <p:nvPr/>
+      </p:nvGrpSpPr>
+      <p:grpSpPr>
+        <a:xfrm>
+          <a:off x="0" y="0"/>
+          <a:ext cx="0" cy="0"/>
+          <a:chOff x="0" y="0"/>
+          <a:chExt cx="0" cy="0"/>
+        </a:xfrm>
+      </p:grpSpPr>
+      <p:sp>
+        <p:nvSpPr>
+          <p:cNvPr id="2" name="标题 1">
+            <a:extLst>
+              <a:ext uri="{FF2B5EF4-FFF2-40B4-BE49-F238E27FC236}">
+                <a16:creationId xmlns:a16="http://schemas.microsoft.com/office/drawing/2014/main" id="{003BA47E-2428-6B64-A107-0E9583CB635A}"/>
+              </a:ext>
+            </a:extLst>
+          </p:cNvPr>
+          <p:cNvSpPr>
+            <a:spLocks noGrp="1"/>
+          </p:cNvSpPr>
+          <p:nvPr>
+            <p:ph type="title"/>
+          </p:nvPr>
+        </p:nvSpPr>
+        <p:spPr/>
+        <p:txBody>
+          <a:bodyPr/>
+          <a:lstStyle/>
+          <a:p>
+            <a:r>
+              <a:rPr lang="zh-CN" altLang="en-US" b="1" dirty="0"/>
+              <a:t>无效或负面优化：倒排文件索引</a:t>
+            </a:r>
+          </a:p>
+        </p:txBody>
+      </p:sp>
+      <p:sp>
+        <p:nvSpPr>
+          <p:cNvPr id="3" name="内容占位符 2">
+            <a:extLst>
+              <a:ext uri="{FF2B5EF4-FFF2-40B4-BE49-F238E27FC236}">
+                <a16:creationId xmlns:a16="http://schemas.microsoft.com/office/drawing/2014/main" id="{8A39E644-D98E-69FF-3BC4-A2AF4D602AA0}"/>
+              </a:ext>
+            </a:extLst>
+          </p:cNvPr>
+          <p:cNvSpPr>
+            <a:spLocks noGrp="1"/>
+          </p:cNvSpPr>
+          <p:nvPr>
+            <p:ph idx="1"/>
+          </p:nvPr>
+        </p:nvSpPr>
+        <p:spPr/>
+        <p:txBody>
+          <a:bodyPr/>
+          <a:lstStyle/>
+          <a:p>
+            <a:r>
+              <a:rPr lang="zh-CN" altLang="en-US" dirty="0"/>
+              <a:t>尝试通过</a:t>
+            </a:r>
+            <a:r>
+              <a:rPr lang="zh-CN" altLang="en-US" b="1" dirty="0"/>
+              <a:t>迭代</a:t>
+            </a:r>
+            <a:r>
+              <a:rPr lang="en-US" altLang="zh-CN" b="1" dirty="0"/>
+              <a:t>K-Means</a:t>
+            </a:r>
+            <a:r>
+              <a:rPr lang="zh-CN" altLang="en-US" b="1" dirty="0"/>
+              <a:t>聚类</a:t>
+            </a:r>
+            <a:r>
+              <a:rPr lang="zh-CN" altLang="en-US" dirty="0"/>
+              <a:t>减少数据集大小，并对</a:t>
+            </a:r>
+            <a:r>
+              <a:rPr lang="zh-CN" altLang="en-US" b="1" dirty="0"/>
+              <a:t>所有的候选的簇进行</a:t>
+            </a:r>
+            <a:r>
+              <a:rPr lang="en-US" altLang="zh-CN" b="1" dirty="0"/>
+              <a:t>BF</a:t>
+            </a:r>
+            <a:r>
+              <a:rPr lang="zh-CN" altLang="en-US" b="1" dirty="0"/>
+              <a:t>搜索</a:t>
+            </a:r>
+            <a:r>
+              <a:rPr lang="zh-CN" altLang="en-US" dirty="0"/>
+              <a:t>。</a:t>
+            </a:r>
+            <a:endParaRPr lang="en-US" altLang="zh-CN" dirty="0"/>
+          </a:p>
+          <a:p>
+            <a:r>
+              <a:rPr lang="zh-CN" altLang="en-US" dirty="0"/>
+              <a:t>由于</a:t>
+            </a:r>
+            <a:r>
+              <a:rPr lang="en-US" altLang="zh-CN" dirty="0"/>
+              <a:t>SIFT-1m</a:t>
+            </a:r>
+            <a:r>
+              <a:rPr lang="zh-CN" altLang="en-US" dirty="0"/>
+              <a:t>和</a:t>
+            </a:r>
+            <a:r>
+              <a:rPr lang="en-US" altLang="zh-CN" dirty="0" err="1"/>
+              <a:t>GloVe</a:t>
+            </a:r>
+            <a:r>
+              <a:rPr lang="zh-CN" altLang="en-US" dirty="0"/>
+              <a:t>数据集分布比较均匀，难以找到合适的</a:t>
+            </a:r>
+            <a:r>
+              <a:rPr lang="en-US" altLang="zh-CN" dirty="0"/>
+              <a:t>K-Means</a:t>
+            </a:r>
+            <a:r>
+              <a:rPr lang="zh-CN" altLang="en-US" dirty="0"/>
+              <a:t>参数使得对数据集做到很好的聚类。</a:t>
+            </a:r>
+            <a:endParaRPr lang="en-US" altLang="zh-CN" dirty="0"/>
+          </a:p>
+          <a:p>
+            <a:r>
+              <a:rPr lang="zh-CN" altLang="en-US" dirty="0"/>
+              <a:t>尝试使用</a:t>
+            </a:r>
+            <a:r>
+              <a:rPr lang="zh-CN" altLang="en-US" b="1" dirty="0"/>
+              <a:t>软聚类</a:t>
+            </a:r>
+            <a:r>
+              <a:rPr lang="zh-CN" altLang="en-US" dirty="0"/>
+              <a:t>的方法，也使性能下降。</a:t>
+            </a:r>
+          </a:p>
+        </p:txBody>
+      </p:sp>
+    </p:spTree>
+    <p:extLst>
+      <p:ext uri="{BB962C8B-B14F-4D97-AF65-F5344CB8AC3E}">
+        <p14:creationId xmlns:p14="http://schemas.microsoft.com/office/powerpoint/2010/main" val="70153916"/>
+      </p:ext>
+    </p:extLst>
+  </p:cSld>
+  <p:clrMapOvr>
+    <a:masterClrMapping/>
+  </p:clrMapOvr>
+  <mc:AlternateContent xmlns:mc="http://schemas.openxmlformats.org/markup-compatibility/2006">
+    <mc:Choice xmlns:p159="http://schemas.microsoft.com/office/powerpoint/2015/09/main" Requires="p159">
+      <p:transition spd="med">
+        <p159:morph option="byWord"/>
+      </p:transition>
+    </mc:Choice>
+    <mc:Fallback>
+      <p:transition spd="med">
+        <p:fade/>
+      </p:transition>
+    </mc:Fallback>
+  </mc:AlternateContent>
+</p:sld>
+</file>
+
+<file path=ppt/slides/slide15.xml><?xml version="1.0" encoding="utf-8"?>
+<p:sld xmlns:a="http://schemas.openxmlformats.org/drawingml/2006/main" xmlns:r="http://schemas.openxmlformats.org/officeDocument/2006/relationships" xmlns:p="http://schemas.openxmlformats.org/presentationml/2006/main">
+  <p:cSld>
+    <p:spTree>
+      <p:nvGrpSpPr>
+        <p:cNvPr id="1" name=""/>
+        <p:cNvGrpSpPr/>
+        <p:nvPr/>
+      </p:nvGrpSpPr>
+      <p:grpSpPr>
+        <a:xfrm>
+          <a:off x="0" y="0"/>
+          <a:ext cx="0" cy="0"/>
+          <a:chOff x="0" y="0"/>
+          <a:chExt cx="0" cy="0"/>
+        </a:xfrm>
+      </p:grpSpPr>
+      <p:sp>
+        <p:nvSpPr>
+          <p:cNvPr id="2" name="标题 1">
+            <a:extLst>
+              <a:ext uri="{FF2B5EF4-FFF2-40B4-BE49-F238E27FC236}">
+                <a16:creationId xmlns:a16="http://schemas.microsoft.com/office/drawing/2014/main" id="{6A474A06-C9E3-EA30-47A8-3807599619E6}"/>
+              </a:ext>
+            </a:extLst>
+          </p:cNvPr>
+          <p:cNvSpPr>
+            <a:spLocks noGrp="1"/>
+          </p:cNvSpPr>
+          <p:nvPr>
+            <p:ph type="title"/>
+          </p:nvPr>
+        </p:nvSpPr>
+        <p:spPr/>
+        <p:txBody>
+          <a:bodyPr/>
+          <a:lstStyle/>
+          <a:p>
+            <a:r>
+              <a:rPr lang="zh-CN" altLang="en-US" b="1" dirty="0"/>
+              <a:t>无效或负面优化分析：高层</a:t>
+            </a:r>
+            <a:r>
+              <a:rPr lang="en-US" altLang="zh-CN" b="1" dirty="0"/>
+              <a:t>Beam Search</a:t>
+            </a:r>
+            <a:endParaRPr lang="zh-CN" altLang="en-US" b="1" dirty="0"/>
+          </a:p>
+        </p:txBody>
+      </p:sp>
+      <p:sp>
+        <p:nvSpPr>
+          <p:cNvPr id="3" name="内容占位符 2">
+            <a:extLst>
+              <a:ext uri="{FF2B5EF4-FFF2-40B4-BE49-F238E27FC236}">
+                <a16:creationId xmlns:a16="http://schemas.microsoft.com/office/drawing/2014/main" id="{DD5DAAFE-F95F-C62E-B7F2-7950DE0DE0D7}"/>
+              </a:ext>
+            </a:extLst>
+          </p:cNvPr>
+          <p:cNvSpPr>
+            <a:spLocks noGrp="1"/>
+          </p:cNvSpPr>
+          <p:nvPr>
+            <p:ph idx="1"/>
+          </p:nvPr>
+        </p:nvSpPr>
+        <p:spPr/>
+        <p:txBody>
+          <a:bodyPr/>
+          <a:lstStyle/>
+          <a:p>
+            <a:r>
+              <a:rPr lang="zh-CN" altLang="en-US" dirty="0"/>
+              <a:t>尝试将</a:t>
+            </a:r>
+            <a:r>
+              <a:rPr lang="en-US" altLang="zh-CN" dirty="0"/>
+              <a:t>HNSW</a:t>
+            </a:r>
+            <a:r>
+              <a:rPr lang="zh-CN" altLang="en-US" dirty="0"/>
+              <a:t>上层导航的贪心搜索替换为</a:t>
+            </a:r>
+            <a:r>
+              <a:rPr lang="en-US" altLang="zh-CN" b="1" dirty="0"/>
+              <a:t>Exploration Factor</a:t>
+            </a:r>
+            <a:r>
+              <a:rPr lang="zh-CN" altLang="en-US" b="1" dirty="0"/>
+              <a:t>较小的</a:t>
+            </a:r>
+            <a:r>
+              <a:rPr lang="en-US" altLang="zh-CN" b="1" dirty="0"/>
+              <a:t>Beam Search</a:t>
+            </a:r>
+            <a:r>
+              <a:rPr lang="zh-CN" altLang="en-US" dirty="0"/>
+              <a:t>，在进入第</a:t>
+            </a:r>
+            <a:r>
+              <a:rPr lang="en-US" altLang="zh-CN" dirty="0"/>
+              <a:t>0</a:t>
+            </a:r>
+            <a:r>
+              <a:rPr lang="zh-CN" altLang="en-US" dirty="0"/>
+              <a:t>层使从</a:t>
+            </a:r>
+            <a:r>
+              <a:rPr lang="zh-CN" altLang="en-US" b="1" dirty="0"/>
+              <a:t>多个</a:t>
+            </a:r>
+            <a:r>
+              <a:rPr lang="en-US" altLang="zh-CN" dirty="0"/>
+              <a:t>Entry Point</a:t>
+            </a:r>
+            <a:r>
+              <a:rPr lang="zh-CN" altLang="en-US" dirty="0"/>
+              <a:t>开始搜索。问题在于：</a:t>
+            </a:r>
+            <a:endParaRPr lang="en-US" altLang="zh-CN" dirty="0"/>
+          </a:p>
+          <a:p>
+            <a:pPr lvl="1"/>
+            <a:r>
+              <a:rPr lang="zh-CN" altLang="en-US" dirty="0"/>
+              <a:t>高层的贪心导航已经可以导航到距离</a:t>
+            </a:r>
+            <a:r>
+              <a:rPr lang="en-US" altLang="zh-CN" dirty="0"/>
+              <a:t>Query</a:t>
+            </a:r>
+            <a:r>
+              <a:rPr lang="zh-CN" altLang="en-US" dirty="0"/>
+              <a:t>很近的向量，使用</a:t>
+            </a:r>
+            <a:r>
+              <a:rPr lang="en-US" altLang="zh-CN" dirty="0"/>
+              <a:t>Beam Search</a:t>
+            </a:r>
+            <a:r>
+              <a:rPr lang="zh-CN" altLang="en-US" b="1" dirty="0"/>
+              <a:t>不能引入</a:t>
+            </a:r>
+            <a:r>
+              <a:rPr lang="zh-CN" altLang="en-US" dirty="0"/>
+              <a:t>更优的</a:t>
+            </a:r>
+            <a:r>
+              <a:rPr lang="en-US" altLang="zh-CN" dirty="0"/>
+              <a:t>Entry Point</a:t>
+            </a:r>
+            <a:r>
+              <a:rPr lang="zh-CN" altLang="en-US" dirty="0"/>
+              <a:t>。</a:t>
+            </a:r>
+            <a:endParaRPr lang="en-US" altLang="zh-CN" dirty="0"/>
+          </a:p>
+          <a:p>
+            <a:pPr lvl="1"/>
+            <a:r>
+              <a:rPr lang="zh-CN" altLang="en-US" dirty="0"/>
+              <a:t>高层导航的目的是为了</a:t>
+            </a:r>
+            <a:r>
+              <a:rPr lang="zh-CN" altLang="en-US" b="1" dirty="0"/>
+              <a:t>快速逼近</a:t>
+            </a:r>
+            <a:r>
+              <a:rPr lang="en-US" altLang="zh-CN" dirty="0"/>
+              <a:t>Query</a:t>
+            </a:r>
+            <a:r>
+              <a:rPr lang="zh-CN" altLang="en-US" dirty="0"/>
+              <a:t>；而第</a:t>
+            </a:r>
+            <a:r>
+              <a:rPr lang="en-US" altLang="zh-CN" dirty="0"/>
+              <a:t>0</a:t>
+            </a:r>
+            <a:r>
+              <a:rPr lang="zh-CN" altLang="en-US" dirty="0"/>
+              <a:t>层的导航目的使为了找到绝对最优的</a:t>
+            </a:r>
+            <a:r>
+              <a:rPr lang="en-US" altLang="zh-CN" dirty="0"/>
+              <a:t>10</a:t>
+            </a:r>
+            <a:r>
+              <a:rPr lang="zh-CN" altLang="en-US" dirty="0"/>
+              <a:t>个向量，有一个</a:t>
+            </a:r>
+            <a:r>
+              <a:rPr lang="zh-CN" altLang="en-US" b="1" dirty="0"/>
+              <a:t>扩散</a:t>
+            </a:r>
+            <a:r>
+              <a:rPr lang="zh-CN" altLang="en-US" dirty="0"/>
+              <a:t>的过程。</a:t>
+            </a:r>
+            <a:endParaRPr lang="en-US" altLang="zh-CN" dirty="0"/>
+          </a:p>
+        </p:txBody>
+      </p:sp>
+    </p:spTree>
+    <p:extLst>
+      <p:ext uri="{BB962C8B-B14F-4D97-AF65-F5344CB8AC3E}">
+        <p14:creationId xmlns:p14="http://schemas.microsoft.com/office/powerpoint/2010/main" val="774190148"/>
+      </p:ext>
+    </p:extLst>
+  </p:cSld>
+  <p:clrMapOvr>
+    <a:masterClrMapping/>
+  </p:clrMapOvr>
+  <mc:AlternateContent xmlns:mc="http://schemas.openxmlformats.org/markup-compatibility/2006">
+    <mc:Choice xmlns:p159="http://schemas.microsoft.com/office/powerpoint/2015/09/main" Requires="p159">
+      <p:transition spd="med">
+        <p159:morph option="byWord"/>
+      </p:transition>
+    </mc:Choice>
+    <mc:Fallback>
+      <p:transition spd="med">
+        <p:fade/>
+      </p:transition>
+    </mc:Fallback>
+  </mc:AlternateContent>
+</p:sld>
+</file>
+
+<file path=ppt/slides/slide16.xml><?xml version="1.0" encoding="utf-8"?>
+<p:sld xmlns:a="http://schemas.openxmlformats.org/drawingml/2006/main" xmlns:r="http://schemas.openxmlformats.org/officeDocument/2006/relationships" xmlns:p="http://schemas.openxmlformats.org/presentationml/2006/main">
+  <p:cSld>
+    <p:spTree>
+      <p:nvGrpSpPr>
+        <p:cNvPr id="1" name=""/>
+        <p:cNvGrpSpPr/>
+        <p:nvPr/>
+      </p:nvGrpSpPr>
+      <p:grpSpPr>
+        <a:xfrm>
+          <a:off x="0" y="0"/>
+          <a:ext cx="0" cy="0"/>
+          <a:chOff x="0" y="0"/>
+          <a:chExt cx="0" cy="0"/>
+        </a:xfrm>
+      </p:grpSpPr>
+      <p:sp>
+        <p:nvSpPr>
+          <p:cNvPr id="2" name="!!1">
+            <a:extLst>
+              <a:ext uri="{FF2B5EF4-FFF2-40B4-BE49-F238E27FC236}">
+                <a16:creationId xmlns:a16="http://schemas.microsoft.com/office/drawing/2014/main" id="{21B694E9-F5E4-05DC-08CD-2226372E9192}"/>
+              </a:ext>
+            </a:extLst>
+          </p:cNvPr>
+          <p:cNvSpPr>
+            <a:spLocks noGrp="1"/>
+          </p:cNvSpPr>
+          <p:nvPr>
+            <p:ph type="title"/>
+          </p:nvPr>
+        </p:nvSpPr>
+        <p:spPr/>
+        <p:txBody>
+          <a:bodyPr/>
+          <a:lstStyle/>
+          <a:p>
+            <a:r>
+              <a:rPr lang="zh-CN" altLang="en-US" b="1" dirty="0"/>
               <a:t>测试结果</a:t>
+            </a:r>
+          </a:p>
+        </p:txBody>
+      </p:sp>
+    </p:spTree>
+    <p:extLst>
+      <p:ext uri="{BB962C8B-B14F-4D97-AF65-F5344CB8AC3E}">
+        <p14:creationId xmlns:p14="http://schemas.microsoft.com/office/powerpoint/2010/main" val="3295475589"/>
+      </p:ext>
+    </p:extLst>
+  </p:cSld>
+  <p:clrMapOvr>
+    <a:masterClrMapping/>
+  </p:clrMapOvr>
+  <p:transition spd="med">
+    <p:fade/>
+  </p:transition>
+</p:sld>
+</file>
+
+<file path=ppt/slides/slide17.xml><?xml version="1.0" encoding="utf-8"?>
+<p:sld xmlns:a="http://schemas.openxmlformats.org/drawingml/2006/main" xmlns:r="http://schemas.openxmlformats.org/officeDocument/2006/relationships" xmlns:p="http://schemas.openxmlformats.org/presentationml/2006/main">
+  <p:cSld>
+    <p:spTree>
+      <p:nvGrpSpPr>
+        <p:cNvPr id="1" name=""/>
+        <p:cNvGrpSpPr/>
+        <p:nvPr/>
+      </p:nvGrpSpPr>
+      <p:grpSpPr>
+        <a:xfrm>
+          <a:off x="0" y="0"/>
+          <a:ext cx="0" cy="0"/>
+          <a:chOff x="0" y="0"/>
+          <a:chExt cx="0" cy="0"/>
+        </a:xfrm>
+      </p:grpSpPr>
+      <p:sp>
+        <p:nvSpPr>
+          <p:cNvPr id="2" name="!!1">
+            <a:extLst>
+              <a:ext uri="{FF2B5EF4-FFF2-40B4-BE49-F238E27FC236}">
+                <a16:creationId xmlns:a16="http://schemas.microsoft.com/office/drawing/2014/main" id="{B3BC6E61-D740-72C1-85EE-D9960D2642BE}"/>
+              </a:ext>
+            </a:extLst>
+          </p:cNvPr>
+          <p:cNvSpPr>
+            <a:spLocks noGrp="1"/>
+          </p:cNvSpPr>
+          <p:nvPr>
+            <p:ph type="title"/>
+          </p:nvPr>
+        </p:nvSpPr>
+        <p:spPr/>
+        <p:txBody>
+          <a:bodyPr/>
+          <a:lstStyle/>
+          <a:p>
+            <a:r>
+              <a:rPr lang="zh-CN" altLang="en-US" b="1" dirty="0"/>
+              <a:t>测试结果（</a:t>
+            </a:r>
+            <a:r>
+              <a:rPr lang="en-US" altLang="zh-CN" b="1" dirty="0"/>
+              <a:t>Sift-1m / </a:t>
+            </a:r>
+            <a:r>
+              <a:rPr lang="en-US" altLang="zh-CN" b="1" dirty="0" err="1"/>
+              <a:t>GloVe</a:t>
+            </a:r>
+            <a:r>
+              <a:rPr lang="zh-CN" altLang="en-US" b="1" dirty="0"/>
+              <a:t>）</a:t>
             </a:r>
           </a:p>
         </p:txBody>
@@ -3707,7 +4939,7 @@
             <p:ph idx="1"/>
             <p:extLst>
               <p:ext uri="{D42A27DB-BD31-4B8C-83A1-F6EECF244321}">
-                <p14:modId xmlns:p14="http://schemas.microsoft.com/office/powerpoint/2010/main" val="84881121"/>
+                <p14:modId xmlns:p14="http://schemas.microsoft.com/office/powerpoint/2010/main" val="437321222"/>
               </p:ext>
             </p:extLst>
           </p:nvPr>
@@ -3720,7 +4952,7 @@
           <a:graphicData uri="http://schemas.openxmlformats.org/drawingml/2006/table">
             <a:tbl>
               <a:tblPr firstRow="1" bandRow="1">
-                <a:tableStyleId>{073A0DAA-6AF3-43AB-8588-CEC1D06C72B9}</a:tableStyleId>
+                <a:tableStyleId>{7E9639D4-E3E2-4D34-9284-5A2195B3D0D7}</a:tableStyleId>
               </a:tblPr>
               <a:tblGrid>
                 <a:gridCol w="1752600">
@@ -4512,6 +5744,18 @@
   <p:clrMapOvr>
     <a:masterClrMapping/>
   </p:clrMapOvr>
+  <mc:AlternateContent xmlns:mc="http://schemas.openxmlformats.org/markup-compatibility/2006">
+    <mc:Choice xmlns:p159="http://schemas.microsoft.com/office/powerpoint/2015/09/main" Requires="p159">
+      <p:transition spd="med">
+        <p159:morph option="byObject"/>
+      </p:transition>
+    </mc:Choice>
+    <mc:Fallback>
+      <p:transition spd="med">
+        <p:fade/>
+      </p:transition>
+    </mc:Fallback>
+  </mc:AlternateContent>
 </p:sld>
 </file>
 
@@ -4537,7 +5781,7 @@
           <p:cNvPr id="2" name="标题 1">
             <a:extLst>
               <a:ext uri="{FF2B5EF4-FFF2-40B4-BE49-F238E27FC236}">
-                <a16:creationId xmlns:a16="http://schemas.microsoft.com/office/drawing/2014/main" id="{EF162323-97DF-5F22-FDC1-FA7DDB3C187A}"/>
+                <a16:creationId xmlns:a16="http://schemas.microsoft.com/office/drawing/2014/main" id="{8C3934DC-17C9-2E11-88AE-CF5828D16E38}"/>
               </a:ext>
             </a:extLst>
           </p:cNvPr>
@@ -4554,18 +5798,18 @@
           <a:lstStyle/>
           <a:p>
             <a:r>
-              <a:rPr lang="zh-CN" altLang="en-US" dirty="0"/>
-              <a:t>项目背景与任务定义</a:t>
-            </a:r>
-          </a:p>
-        </p:txBody>
-      </p:sp>
-      <p:sp>
-        <p:nvSpPr>
-          <p:cNvPr id="3" name="内容占位符 2">
-            <a:extLst>
-              <a:ext uri="{FF2B5EF4-FFF2-40B4-BE49-F238E27FC236}">
-                <a16:creationId xmlns:a16="http://schemas.microsoft.com/office/drawing/2014/main" id="{F8CEE6F1-58AB-060B-70A3-97B6200AE819}"/>
+              <a:rPr lang="zh-CN" altLang="en-US" b="1" dirty="0"/>
+              <a:t>目录</a:t>
+            </a:r>
+          </a:p>
+        </p:txBody>
+      </p:sp>
+      <p:sp>
+        <p:nvSpPr>
+          <p:cNvPr id="3" name="!!1">
+            <a:extLst>
+              <a:ext uri="{FF2B5EF4-FFF2-40B4-BE49-F238E27FC236}">
+                <a16:creationId xmlns:a16="http://schemas.microsoft.com/office/drawing/2014/main" id="{0A9CCE1E-1405-009C-14D5-A76ED0AB3E05}"/>
               </a:ext>
             </a:extLst>
           </p:cNvPr>
@@ -4576,92 +5820,64 @@
             <p:ph idx="1"/>
           </p:nvPr>
         </p:nvSpPr>
-        <p:spPr/>
+        <p:spPr>
+          <a:xfrm>
+            <a:off x="838200" y="1825625"/>
+            <a:ext cx="10515600" cy="4351338"/>
+          </a:xfrm>
+        </p:spPr>
         <p:txBody>
           <a:bodyPr/>
           <a:lstStyle/>
           <a:p>
             <a:r>
               <a:rPr lang="zh-CN" altLang="en-US" dirty="0"/>
-              <a:t>核心任务：从</a:t>
-            </a:r>
-            <a:r>
-              <a:rPr lang="en-US" altLang="zh-CN" dirty="0"/>
-              <a:t>N</a:t>
-            </a:r>
-            <a:r>
-              <a:rPr lang="zh-CN" altLang="en-US" dirty="0"/>
-              <a:t>个</a:t>
-            </a:r>
-            <a:r>
-              <a:rPr lang="en-US" altLang="zh-CN" dirty="0"/>
-              <a:t>D</a:t>
-            </a:r>
-            <a:r>
-              <a:rPr lang="zh-CN" altLang="en-US" dirty="0"/>
-              <a:t>维向量集</a:t>
-            </a:r>
-            <a:r>
-              <a:rPr lang="en-US" altLang="zh-CN" dirty="0"/>
-              <a:t>S</a:t>
-            </a:r>
-            <a:r>
-              <a:rPr lang="zh-CN" altLang="en-US" dirty="0"/>
-              <a:t>中，找到与查询向量</a:t>
-            </a:r>
-            <a:r>
-              <a:rPr lang="en-US" altLang="zh-CN" dirty="0"/>
-              <a:t>q</a:t>
-            </a:r>
-            <a:r>
-              <a:rPr lang="zh-CN" altLang="en-US" dirty="0"/>
-              <a:t>欧氏距离最近的</a:t>
-            </a:r>
-            <a:r>
-              <a:rPr lang="en-US" altLang="zh-CN" dirty="0"/>
-              <a:t>10</a:t>
-            </a:r>
-            <a:r>
-              <a:rPr lang="zh-CN" altLang="en-US" dirty="0"/>
-              <a:t>个向量。</a:t>
+              <a:t>项目总览</a:t>
             </a:r>
             <a:endParaRPr lang="en-US" altLang="zh-CN" dirty="0"/>
           </a:p>
           <a:p>
             <a:r>
               <a:rPr lang="zh-CN" altLang="en-US" dirty="0"/>
-              <a:t>挑战与对策：精确搜索成本过高，采用近似最近邻搜索（</a:t>
-            </a:r>
-            <a:r>
-              <a:rPr lang="en-US" altLang="zh-CN" dirty="0"/>
-              <a:t>ANNS</a:t>
-            </a:r>
-            <a:r>
-              <a:rPr lang="zh-CN" altLang="en-US" dirty="0"/>
-              <a:t>）。在召回率和搜索延迟之间寻找平衡，实现远优于</a:t>
-            </a:r>
-            <a:r>
-              <a:rPr lang="en-US" altLang="zh-CN" dirty="0"/>
-              <a:t>O(N)</a:t>
-            </a:r>
-            <a:r>
-              <a:rPr lang="zh-CN" altLang="en-US" dirty="0"/>
-              <a:t>的复杂度。</a:t>
+              <a:t>全局工程优化</a:t>
             </a:r>
             <a:endParaRPr lang="en-US" altLang="zh-CN" dirty="0"/>
+          </a:p>
+          <a:p>
+            <a:r>
+              <a:rPr lang="zh-CN" altLang="en-US" dirty="0"/>
+              <a:t>有效优化策略</a:t>
+            </a:r>
+            <a:endParaRPr lang="en-US" altLang="zh-CN" dirty="0"/>
+          </a:p>
+          <a:p>
+            <a:r>
+              <a:rPr lang="zh-CN" altLang="en-US" dirty="0"/>
+              <a:t>无效或负优化策略</a:t>
+            </a:r>
+            <a:endParaRPr lang="en-US" altLang="zh-CN" dirty="0"/>
+          </a:p>
+          <a:p>
+            <a:r>
+              <a:rPr lang="zh-CN" altLang="en-US" dirty="0"/>
+              <a:t>测试数据</a:t>
+            </a:r>
           </a:p>
         </p:txBody>
       </p:sp>
     </p:spTree>
     <p:extLst>
       <p:ext uri="{BB962C8B-B14F-4D97-AF65-F5344CB8AC3E}">
-        <p14:creationId xmlns:p14="http://schemas.microsoft.com/office/powerpoint/2010/main" val="3497159193"/>
+        <p14:creationId xmlns:p14="http://schemas.microsoft.com/office/powerpoint/2010/main" val="2109641877"/>
       </p:ext>
     </p:extLst>
   </p:cSld>
   <p:clrMapOvr>
     <a:masterClrMapping/>
   </p:clrMapOvr>
+  <p:transition spd="med">
+    <p:fade/>
+  </p:transition>
 </p:sld>
 </file>
 
@@ -4684,10 +5900,10 @@
       </p:grpSpPr>
       <p:sp>
         <p:nvSpPr>
-          <p:cNvPr id="2" name="标题 1">
-            <a:extLst>
-              <a:ext uri="{FF2B5EF4-FFF2-40B4-BE49-F238E27FC236}">
-                <a16:creationId xmlns:a16="http://schemas.microsoft.com/office/drawing/2014/main" id="{61D9DAFA-4458-2BAD-A1B1-1155E2C89FB0}"/>
+          <p:cNvPr id="2" name="!!1">
+            <a:extLst>
+              <a:ext uri="{FF2B5EF4-FFF2-40B4-BE49-F238E27FC236}">
+                <a16:creationId xmlns:a16="http://schemas.microsoft.com/office/drawing/2014/main" id="{726C26D5-9CE3-08BE-55F0-9435ABB547B9}"/>
               </a:ext>
             </a:extLst>
           </p:cNvPr>
@@ -4704,6 +5920,259 @@
           <a:lstStyle/>
           <a:p>
             <a:r>
+              <a:rPr lang="zh-CN" altLang="en-US" b="1" dirty="0"/>
+              <a:t>项目总览</a:t>
+            </a:r>
+          </a:p>
+        </p:txBody>
+      </p:sp>
+      <p:sp>
+        <p:nvSpPr>
+          <p:cNvPr id="3" name="!!2">
+            <a:extLst>
+              <a:ext uri="{FF2B5EF4-FFF2-40B4-BE49-F238E27FC236}">
+                <a16:creationId xmlns:a16="http://schemas.microsoft.com/office/drawing/2014/main" id="{42CEF000-F395-DBA4-3977-3334C97F8D43}"/>
+              </a:ext>
+            </a:extLst>
+          </p:cNvPr>
+          <p:cNvSpPr>
+            <a:spLocks noGrp="1"/>
+          </p:cNvSpPr>
+          <p:nvPr>
+            <p:ph type="body" idx="1"/>
+          </p:nvPr>
+        </p:nvSpPr>
+        <p:spPr/>
+        <p:txBody>
+          <a:bodyPr/>
+          <a:lstStyle/>
+          <a:p>
+            <a:pPr marL="342900" indent="-342900">
+              <a:buFont typeface="Arial" panose="020B0604020202020204" pitchFamily="34" charset="0"/>
+              <a:buChar char="•"/>
+            </a:pPr>
+            <a:r>
+              <a:rPr lang="zh-CN" altLang="en-US" dirty="0"/>
+              <a:t>项目背景与任务定义</a:t>
+            </a:r>
+          </a:p>
+        </p:txBody>
+      </p:sp>
+      <p:sp>
+        <p:nvSpPr>
+          <p:cNvPr id="4" name="!!2">
+            <a:extLst>
+              <a:ext uri="{FF2B5EF4-FFF2-40B4-BE49-F238E27FC236}">
+                <a16:creationId xmlns:a16="http://schemas.microsoft.com/office/drawing/2014/main" id="{5FAC3331-D576-F534-7882-9458DBAA4128}"/>
+              </a:ext>
+            </a:extLst>
+          </p:cNvPr>
+          <p:cNvSpPr txBox="1">
+            <a:spLocks/>
+          </p:cNvSpPr>
+          <p:nvPr/>
+        </p:nvSpPr>
+        <p:spPr>
+          <a:xfrm>
+            <a:off x="831850" y="5005098"/>
+            <a:ext cx="10515600" cy="1500187"/>
+          </a:xfrm>
+          <a:prstGeom prst="rect">
+            <a:avLst/>
+          </a:prstGeom>
+        </p:spPr>
+        <p:txBody>
+          <a:bodyPr vert="horz" lIns="91440" tIns="45720" rIns="91440" bIns="45720" rtlCol="0">
+            <a:normAutofit/>
+          </a:bodyPr>
+          <a:lstStyle>
+            <a:lvl1pPr marL="0" indent="0" algn="l" defTabSz="914400" rtl="0" eaLnBrk="1" latinLnBrk="0" hangingPunct="1">
+              <a:lnSpc>
+                <a:spcPct val="90000"/>
+              </a:lnSpc>
+              <a:spcBef>
+                <a:spcPts val="1000"/>
+              </a:spcBef>
+              <a:buFont typeface="Arial" panose="020B0604020202020204" pitchFamily="34" charset="0"/>
+              <a:buNone/>
+              <a:defRPr sz="2400" kern="1200">
+                <a:solidFill>
+                  <a:schemeClr val="tx1">
+                    <a:tint val="75000"/>
+                  </a:schemeClr>
+                </a:solidFill>
+                <a:latin typeface="+mn-lt"/>
+                <a:ea typeface="+mn-ea"/>
+                <a:cs typeface="+mn-cs"/>
+              </a:defRPr>
+            </a:lvl1pPr>
+            <a:lvl2pPr marL="457200" indent="0" algn="l" defTabSz="914400" rtl="0" eaLnBrk="1" latinLnBrk="0" hangingPunct="1">
+              <a:lnSpc>
+                <a:spcPct val="90000"/>
+              </a:lnSpc>
+              <a:spcBef>
+                <a:spcPts val="500"/>
+              </a:spcBef>
+              <a:buFont typeface="Arial" panose="020B0604020202020204" pitchFamily="34" charset="0"/>
+              <a:buNone/>
+              <a:defRPr sz="2000" kern="1200">
+                <a:solidFill>
+                  <a:schemeClr val="tx1">
+                    <a:tint val="75000"/>
+                  </a:schemeClr>
+                </a:solidFill>
+                <a:latin typeface="+mn-lt"/>
+                <a:ea typeface="+mn-ea"/>
+                <a:cs typeface="+mn-cs"/>
+              </a:defRPr>
+            </a:lvl2pPr>
+            <a:lvl3pPr marL="914400" indent="0" algn="l" defTabSz="914400" rtl="0" eaLnBrk="1" latinLnBrk="0" hangingPunct="1">
+              <a:lnSpc>
+                <a:spcPct val="90000"/>
+              </a:lnSpc>
+              <a:spcBef>
+                <a:spcPts val="500"/>
+              </a:spcBef>
+              <a:buFont typeface="Arial" panose="020B0604020202020204" pitchFamily="34" charset="0"/>
+              <a:buNone/>
+              <a:defRPr sz="1800" kern="1200">
+                <a:solidFill>
+                  <a:schemeClr val="tx1">
+                    <a:tint val="75000"/>
+                  </a:schemeClr>
+                </a:solidFill>
+                <a:latin typeface="+mn-lt"/>
+                <a:ea typeface="+mn-ea"/>
+                <a:cs typeface="+mn-cs"/>
+              </a:defRPr>
+            </a:lvl3pPr>
+            <a:lvl4pPr marL="1371600" indent="0" algn="l" defTabSz="914400" rtl="0" eaLnBrk="1" latinLnBrk="0" hangingPunct="1">
+              <a:lnSpc>
+                <a:spcPct val="90000"/>
+              </a:lnSpc>
+              <a:spcBef>
+                <a:spcPts val="500"/>
+              </a:spcBef>
+              <a:buFont typeface="Arial" panose="020B0604020202020204" pitchFamily="34" charset="0"/>
+              <a:buNone/>
+              <a:defRPr sz="1600" kern="1200">
+                <a:solidFill>
+                  <a:schemeClr val="tx1">
+                    <a:tint val="75000"/>
+                  </a:schemeClr>
+                </a:solidFill>
+                <a:latin typeface="+mn-lt"/>
+                <a:ea typeface="+mn-ea"/>
+                <a:cs typeface="+mn-cs"/>
+              </a:defRPr>
+            </a:lvl4pPr>
+            <a:lvl5pPr marL="1828800" indent="0" algn="l" defTabSz="914400" rtl="0" eaLnBrk="1" latinLnBrk="0" hangingPunct="1">
+              <a:lnSpc>
+                <a:spcPct val="90000"/>
+              </a:lnSpc>
+              <a:spcBef>
+                <a:spcPts val="500"/>
+              </a:spcBef>
+              <a:buFont typeface="Arial" panose="020B0604020202020204" pitchFamily="34" charset="0"/>
+              <a:buNone/>
+              <a:defRPr sz="1600" kern="1200">
+                <a:solidFill>
+                  <a:schemeClr val="tx1">
+                    <a:tint val="75000"/>
+                  </a:schemeClr>
+                </a:solidFill>
+                <a:latin typeface="+mn-lt"/>
+                <a:ea typeface="+mn-ea"/>
+                <a:cs typeface="+mn-cs"/>
+              </a:defRPr>
+            </a:lvl5pPr>
+            <a:lvl6pPr marL="2286000" indent="0" algn="l" defTabSz="914400" rtl="0" eaLnBrk="1" latinLnBrk="0" hangingPunct="1">
+              <a:lnSpc>
+                <a:spcPct val="90000"/>
+              </a:lnSpc>
+              <a:spcBef>
+                <a:spcPts val="500"/>
+              </a:spcBef>
+              <a:buFont typeface="Arial" panose="020B0604020202020204" pitchFamily="34" charset="0"/>
+              <a:buNone/>
+              <a:defRPr sz="1600" kern="1200">
+                <a:solidFill>
+                  <a:schemeClr val="tx1">
+                    <a:tint val="75000"/>
+                  </a:schemeClr>
+                </a:solidFill>
+                <a:latin typeface="+mn-lt"/>
+                <a:ea typeface="+mn-ea"/>
+                <a:cs typeface="+mn-cs"/>
+              </a:defRPr>
+            </a:lvl6pPr>
+            <a:lvl7pPr marL="2743200" indent="0" algn="l" defTabSz="914400" rtl="0" eaLnBrk="1" latinLnBrk="0" hangingPunct="1">
+              <a:lnSpc>
+                <a:spcPct val="90000"/>
+              </a:lnSpc>
+              <a:spcBef>
+                <a:spcPts val="500"/>
+              </a:spcBef>
+              <a:buFont typeface="Arial" panose="020B0604020202020204" pitchFamily="34" charset="0"/>
+              <a:buNone/>
+              <a:defRPr sz="1600" kern="1200">
+                <a:solidFill>
+                  <a:schemeClr val="tx1">
+                    <a:tint val="75000"/>
+                  </a:schemeClr>
+                </a:solidFill>
+                <a:latin typeface="+mn-lt"/>
+                <a:ea typeface="+mn-ea"/>
+                <a:cs typeface="+mn-cs"/>
+              </a:defRPr>
+            </a:lvl7pPr>
+            <a:lvl8pPr marL="3200400" indent="0" algn="l" defTabSz="914400" rtl="0" eaLnBrk="1" latinLnBrk="0" hangingPunct="1">
+              <a:lnSpc>
+                <a:spcPct val="90000"/>
+              </a:lnSpc>
+              <a:spcBef>
+                <a:spcPts val="500"/>
+              </a:spcBef>
+              <a:buFont typeface="Arial" panose="020B0604020202020204" pitchFamily="34" charset="0"/>
+              <a:buNone/>
+              <a:defRPr sz="1600" kern="1200">
+                <a:solidFill>
+                  <a:schemeClr val="tx1">
+                    <a:tint val="75000"/>
+                  </a:schemeClr>
+                </a:solidFill>
+                <a:latin typeface="+mn-lt"/>
+                <a:ea typeface="+mn-ea"/>
+                <a:cs typeface="+mn-cs"/>
+              </a:defRPr>
+            </a:lvl8pPr>
+            <a:lvl9pPr marL="3657600" indent="0" algn="l" defTabSz="914400" rtl="0" eaLnBrk="1" latinLnBrk="0" hangingPunct="1">
+              <a:lnSpc>
+                <a:spcPct val="90000"/>
+              </a:lnSpc>
+              <a:spcBef>
+                <a:spcPts val="500"/>
+              </a:spcBef>
+              <a:buFont typeface="Arial" panose="020B0604020202020204" pitchFamily="34" charset="0"/>
+              <a:buNone/>
+              <a:defRPr sz="1600" kern="1200">
+                <a:solidFill>
+                  <a:schemeClr val="tx1">
+                    <a:tint val="75000"/>
+                  </a:schemeClr>
+                </a:solidFill>
+                <a:latin typeface="+mn-lt"/>
+                <a:ea typeface="+mn-ea"/>
+                <a:cs typeface="+mn-cs"/>
+              </a:defRPr>
+            </a:lvl9pPr>
+          </a:lstStyle>
+          <a:p>
+            <a:pPr marL="342900" indent="-342900">
+              <a:buFont typeface="Arial" panose="020B0604020202020204" pitchFamily="34" charset="0"/>
+              <a:buChar char="•"/>
+            </a:pPr>
+            <a:r>
               <a:rPr lang="en-US" altLang="zh-CN" dirty="0" err="1"/>
               <a:t>TunableHNSW</a:t>
             </a:r>
@@ -4711,114 +6180,27 @@
               <a:rPr lang="zh-CN" altLang="en-US" dirty="0"/>
               <a:t>系统框架</a:t>
             </a:r>
-          </a:p>
-        </p:txBody>
-      </p:sp>
-      <p:sp>
-        <p:nvSpPr>
-          <p:cNvPr id="3" name="内容占位符 2">
-            <a:extLst>
-              <a:ext uri="{FF2B5EF4-FFF2-40B4-BE49-F238E27FC236}">
-                <a16:creationId xmlns:a16="http://schemas.microsoft.com/office/drawing/2014/main" id="{B3084B13-68FE-C8AD-0C52-90D7D3B3BA70}"/>
-              </a:ext>
-            </a:extLst>
-          </p:cNvPr>
-          <p:cNvSpPr>
-            <a:spLocks noGrp="1"/>
-          </p:cNvSpPr>
-          <p:nvPr>
-            <p:ph idx="1"/>
-          </p:nvPr>
-        </p:nvSpPr>
-        <p:spPr/>
-        <p:txBody>
-          <a:bodyPr/>
-          <a:lstStyle/>
-          <a:p>
-            <a:r>
-              <a:rPr lang="zh-CN" altLang="en-US" dirty="0"/>
-              <a:t>设计理念：模块化、可扩展的测试框架，支持参数与优化选项的灵活配置。</a:t>
-            </a:r>
-            <a:endParaRPr lang="en-US" altLang="zh-CN" dirty="0"/>
-          </a:p>
-          <a:p>
-            <a:r>
-              <a:rPr lang="zh-CN" altLang="en-US" dirty="0"/>
-              <a:t>核心模块：</a:t>
-            </a:r>
-            <a:endParaRPr lang="en-US" altLang="zh-CN" dirty="0"/>
-          </a:p>
-          <a:p>
-            <a:pPr lvl="1"/>
-            <a:r>
-              <a:rPr lang="zh-CN" altLang="en-US" dirty="0"/>
-              <a:t>算法实现：</a:t>
-            </a:r>
-            <a:r>
-              <a:rPr lang="en-US" altLang="zh-CN" dirty="0" err="1"/>
-              <a:t>HNSW.h</a:t>
-            </a:r>
             <a:r>
               <a:rPr lang="en-US" altLang="zh-CN" dirty="0"/>
-              <a:t>, </a:t>
-            </a:r>
-            <a:r>
-              <a:rPr lang="en-US" altLang="zh-CN" dirty="0" err="1"/>
-              <a:t>IVF.h</a:t>
-            </a:r>
-            <a:r>
-              <a:rPr lang="en-US" altLang="zh-CN" dirty="0"/>
-              <a:t>, </a:t>
-            </a:r>
-            <a:r>
-              <a:rPr lang="en-US" altLang="zh-CN" dirty="0" err="1"/>
-              <a:t>PQ.h</a:t>
-            </a:r>
-            <a:r>
-              <a:rPr lang="en-US" altLang="zh-CN" dirty="0"/>
-              <a:t>, …</a:t>
-            </a:r>
-          </a:p>
-          <a:p>
-            <a:pPr lvl="1"/>
-            <a:r>
-              <a:rPr lang="en-US" altLang="zh-CN" dirty="0"/>
-              <a:t>Solution</a:t>
-            </a:r>
-            <a:r>
-              <a:rPr lang="zh-CN" altLang="en-US" dirty="0"/>
-              <a:t>配置：</a:t>
-            </a:r>
-            <a:r>
-              <a:rPr lang="en-US" altLang="zh-CN" dirty="0" err="1"/>
-              <a:t>Config.h</a:t>
-            </a:r>
-            <a:endParaRPr lang="en-US" altLang="zh-CN" dirty="0"/>
-          </a:p>
-          <a:p>
-            <a:pPr lvl="1"/>
-            <a:r>
-              <a:rPr lang="zh-CN" altLang="en-US" dirty="0"/>
-              <a:t>部分测试指标：</a:t>
-            </a:r>
-            <a:r>
-              <a:rPr lang="en-US" altLang="zh-CN" dirty="0" err="1"/>
-              <a:t>Metrics,h</a:t>
-            </a:r>
-            <a:endParaRPr lang="en-US" altLang="zh-CN" dirty="0"/>
+              <a:t>2</a:t>
+            </a:r>
+            <a:endParaRPr lang="zh-CN" altLang="en-US" dirty="0"/>
           </a:p>
         </p:txBody>
       </p:sp>
     </p:spTree>
     <p:extLst>
       <p:ext uri="{BB962C8B-B14F-4D97-AF65-F5344CB8AC3E}">
-        <p14:creationId xmlns:p14="http://schemas.microsoft.com/office/powerpoint/2010/main" val="3997466391"/>
+        <p14:creationId xmlns:p14="http://schemas.microsoft.com/office/powerpoint/2010/main" val="2073988583"/>
       </p:ext>
     </p:extLst>
   </p:cSld>
   <p:clrMapOvr>
     <a:masterClrMapping/>
   </p:clrMapOvr>
+  <p:transition spd="med">
+    <p:fade/>
+  </p:transition>
 </p:sld>
 </file>
 
@@ -4841,10 +6223,10 @@
       </p:grpSpPr>
       <p:sp>
         <p:nvSpPr>
-          <p:cNvPr id="2" name="标题 1">
-            <a:extLst>
-              <a:ext uri="{FF2B5EF4-FFF2-40B4-BE49-F238E27FC236}">
-                <a16:creationId xmlns:a16="http://schemas.microsoft.com/office/drawing/2014/main" id="{C341D883-0311-F2DA-A48F-7C19726F7154}"/>
+          <p:cNvPr id="2" name="!!2">
+            <a:extLst>
+              <a:ext uri="{FF2B5EF4-FFF2-40B4-BE49-F238E27FC236}">
+                <a16:creationId xmlns:a16="http://schemas.microsoft.com/office/drawing/2014/main" id="{EF162323-97DF-5F22-FDC1-FA7DDB3C187A}"/>
               </a:ext>
             </a:extLst>
           </p:cNvPr>
@@ -4861,22 +6243,369 @@
           <a:lstStyle/>
           <a:p>
             <a:r>
-              <a:rPr lang="zh-CN" altLang="en-US" dirty="0"/>
+              <a:rPr lang="zh-CN" altLang="en-US" b="1" dirty="0"/>
+              <a:t>项目背景与任务定义</a:t>
+            </a:r>
+          </a:p>
+        </p:txBody>
+      </p:sp>
+      <p:sp>
+        <p:nvSpPr>
+          <p:cNvPr id="3" name="!!3">
+            <a:extLst>
+              <a:ext uri="{FF2B5EF4-FFF2-40B4-BE49-F238E27FC236}">
+                <a16:creationId xmlns:a16="http://schemas.microsoft.com/office/drawing/2014/main" id="{F8CEE6F1-58AB-060B-70A3-97B6200AE819}"/>
+              </a:ext>
+            </a:extLst>
+          </p:cNvPr>
+          <p:cNvSpPr>
+            <a:spLocks noGrp="1"/>
+          </p:cNvSpPr>
+          <p:nvPr>
+            <p:ph idx="1"/>
+          </p:nvPr>
+        </p:nvSpPr>
+        <p:spPr/>
+        <p:txBody>
+          <a:bodyPr/>
+          <a:lstStyle/>
+          <a:p>
+            <a:r>
+              <a:rPr lang="zh-CN" altLang="en-US" dirty="0"/>
+              <a:t>核心任务：从</a:t>
+            </a:r>
+            <a:r>
+              <a:rPr lang="en-US" altLang="zh-CN" dirty="0"/>
+              <a:t>N</a:t>
+            </a:r>
+            <a:r>
+              <a:rPr lang="zh-CN" altLang="en-US" dirty="0"/>
+              <a:t>个</a:t>
+            </a:r>
+            <a:r>
+              <a:rPr lang="en-US" altLang="zh-CN" dirty="0"/>
+              <a:t>D</a:t>
+            </a:r>
+            <a:r>
+              <a:rPr lang="zh-CN" altLang="en-US" dirty="0"/>
+              <a:t>维向量集</a:t>
+            </a:r>
+            <a:r>
+              <a:rPr lang="en-US" altLang="zh-CN" dirty="0"/>
+              <a:t>S</a:t>
+            </a:r>
+            <a:r>
+              <a:rPr lang="zh-CN" altLang="en-US" dirty="0"/>
+              <a:t>中，找到与查询向量</a:t>
+            </a:r>
+            <a:r>
+              <a:rPr lang="en-US" altLang="zh-CN" dirty="0"/>
+              <a:t>q</a:t>
+            </a:r>
+            <a:r>
+              <a:rPr lang="zh-CN" altLang="en-US" dirty="0"/>
+              <a:t>欧氏距离最近的</a:t>
+            </a:r>
+            <a:r>
+              <a:rPr lang="en-US" altLang="zh-CN" dirty="0"/>
+              <a:t>10</a:t>
+            </a:r>
+            <a:r>
+              <a:rPr lang="zh-CN" altLang="en-US" dirty="0"/>
+              <a:t>个向量。</a:t>
+            </a:r>
+            <a:endParaRPr lang="en-US" altLang="zh-CN" dirty="0"/>
+          </a:p>
+          <a:p>
+            <a:r>
+              <a:rPr lang="zh-CN" altLang="en-US" dirty="0"/>
+              <a:t>挑战与对策：精确搜索成本过高，采用近似最近邻搜索（</a:t>
+            </a:r>
+            <a:r>
+              <a:rPr lang="en-US" altLang="zh-CN" dirty="0"/>
+              <a:t>ANNS</a:t>
+            </a:r>
+            <a:r>
+              <a:rPr lang="zh-CN" altLang="en-US" dirty="0"/>
+              <a:t>）。在</a:t>
+            </a:r>
+            <a:r>
+              <a:rPr lang="zh-CN" altLang="en-US" b="1" dirty="0"/>
+              <a:t>召回率</a:t>
+            </a:r>
+            <a:r>
+              <a:rPr lang="zh-CN" altLang="en-US" dirty="0"/>
+              <a:t>和</a:t>
+            </a:r>
+            <a:r>
+              <a:rPr lang="zh-CN" altLang="en-US" b="1" dirty="0"/>
+              <a:t>搜索延迟</a:t>
+            </a:r>
+            <a:r>
+              <a:rPr lang="zh-CN" altLang="en-US" dirty="0"/>
+              <a:t>之间寻找平衡，实现远优于</a:t>
+            </a:r>
+            <a:r>
+              <a:rPr lang="en-US" altLang="zh-CN" dirty="0"/>
+              <a:t>O(N)</a:t>
+            </a:r>
+            <a:r>
+              <a:rPr lang="zh-CN" altLang="en-US" dirty="0"/>
+              <a:t>的复杂度。</a:t>
+            </a:r>
+            <a:endParaRPr lang="en-US" altLang="zh-CN" dirty="0"/>
+          </a:p>
+        </p:txBody>
+      </p:sp>
+    </p:spTree>
+    <p:extLst>
+      <p:ext uri="{BB962C8B-B14F-4D97-AF65-F5344CB8AC3E}">
+        <p14:creationId xmlns:p14="http://schemas.microsoft.com/office/powerpoint/2010/main" val="3497159193"/>
+      </p:ext>
+    </p:extLst>
+  </p:cSld>
+  <p:clrMapOvr>
+    <a:masterClrMapping/>
+  </p:clrMapOvr>
+  <mc:AlternateContent xmlns:mc="http://schemas.openxmlformats.org/markup-compatibility/2006">
+    <mc:Choice xmlns:p159="http://schemas.microsoft.com/office/powerpoint/2015/09/main" Requires="p159">
+      <p:transition spd="med">
+        <p159:morph option="byWord"/>
+      </p:transition>
+    </mc:Choice>
+    <mc:Fallback>
+      <p:transition spd="med">
+        <p:fade/>
+      </p:transition>
+    </mc:Fallback>
+  </mc:AlternateContent>
+</p:sld>
+</file>
+
+<file path=ppt/slides/slide5.xml><?xml version="1.0" encoding="utf-8"?>
+<p:sld xmlns:a="http://schemas.openxmlformats.org/drawingml/2006/main" xmlns:r="http://schemas.openxmlformats.org/officeDocument/2006/relationships" xmlns:p="http://schemas.openxmlformats.org/presentationml/2006/main">
+  <p:cSld>
+    <p:spTree>
+      <p:nvGrpSpPr>
+        <p:cNvPr id="1" name=""/>
+        <p:cNvGrpSpPr/>
+        <p:nvPr/>
+      </p:nvGrpSpPr>
+      <p:grpSpPr>
+        <a:xfrm>
+          <a:off x="0" y="0"/>
+          <a:ext cx="0" cy="0"/>
+          <a:chOff x="0" y="0"/>
+          <a:chExt cx="0" cy="0"/>
+        </a:xfrm>
+      </p:grpSpPr>
+      <p:sp>
+        <p:nvSpPr>
+          <p:cNvPr id="2" name="!!2">
+            <a:extLst>
+              <a:ext uri="{FF2B5EF4-FFF2-40B4-BE49-F238E27FC236}">
+                <a16:creationId xmlns:a16="http://schemas.microsoft.com/office/drawing/2014/main" id="{61D9DAFA-4458-2BAD-A1B1-1155E2C89FB0}"/>
+              </a:ext>
+            </a:extLst>
+          </p:cNvPr>
+          <p:cNvSpPr>
+            <a:spLocks noGrp="1"/>
+          </p:cNvSpPr>
+          <p:nvPr>
+            <p:ph type="title"/>
+          </p:nvPr>
+        </p:nvSpPr>
+        <p:spPr/>
+        <p:txBody>
+          <a:bodyPr/>
+          <a:lstStyle/>
+          <a:p>
+            <a:r>
+              <a:rPr lang="en-US" altLang="zh-CN" b="1" dirty="0" err="1"/>
+              <a:t>TunableHNSW</a:t>
+            </a:r>
+            <a:r>
+              <a:rPr lang="zh-CN" altLang="en-US" b="1" dirty="0"/>
+              <a:t>系统框架</a:t>
+            </a:r>
+          </a:p>
+        </p:txBody>
+      </p:sp>
+      <p:sp>
+        <p:nvSpPr>
+          <p:cNvPr id="3" name="!!3">
+            <a:extLst>
+              <a:ext uri="{FF2B5EF4-FFF2-40B4-BE49-F238E27FC236}">
+                <a16:creationId xmlns:a16="http://schemas.microsoft.com/office/drawing/2014/main" id="{B3084B13-68FE-C8AD-0C52-90D7D3B3BA70}"/>
+              </a:ext>
+            </a:extLst>
+          </p:cNvPr>
+          <p:cNvSpPr>
+            <a:spLocks noGrp="1"/>
+          </p:cNvSpPr>
+          <p:nvPr>
+            <p:ph idx="1"/>
+          </p:nvPr>
+        </p:nvSpPr>
+        <p:spPr/>
+        <p:txBody>
+          <a:bodyPr/>
+          <a:lstStyle/>
+          <a:p>
+            <a:r>
+              <a:rPr lang="zh-CN" altLang="en-US" dirty="0"/>
+              <a:t>设计理念：模块化、可扩展的测试框架，支持参数与优化选项的灵活配置。</a:t>
+            </a:r>
+            <a:endParaRPr lang="en-US" altLang="zh-CN" dirty="0"/>
+          </a:p>
+          <a:p>
+            <a:r>
+              <a:rPr lang="zh-CN" altLang="en-US" dirty="0"/>
+              <a:t>核心模块：</a:t>
+            </a:r>
+            <a:endParaRPr lang="en-US" altLang="zh-CN" dirty="0"/>
+          </a:p>
+          <a:p>
+            <a:pPr lvl="1"/>
+            <a:r>
+              <a:rPr lang="zh-CN" altLang="en-US" dirty="0"/>
+              <a:t>算法实现：</a:t>
+            </a:r>
+            <a:r>
+              <a:rPr lang="en-US" altLang="zh-CN" dirty="0" err="1"/>
+              <a:t>HNSW.h</a:t>
+            </a:r>
+            <a:r>
+              <a:rPr lang="en-US" altLang="zh-CN" dirty="0"/>
+              <a:t>, </a:t>
+            </a:r>
+            <a:r>
+              <a:rPr lang="en-US" altLang="zh-CN" dirty="0" err="1"/>
+              <a:t>IVF.h</a:t>
+            </a:r>
+            <a:r>
+              <a:rPr lang="en-US" altLang="zh-CN" dirty="0"/>
+              <a:t>, </a:t>
+            </a:r>
+            <a:r>
+              <a:rPr lang="en-US" altLang="zh-CN" dirty="0" err="1"/>
+              <a:t>PQ.h</a:t>
+            </a:r>
+            <a:r>
+              <a:rPr lang="en-US" altLang="zh-CN" dirty="0"/>
+              <a:t>, …</a:t>
+            </a:r>
+          </a:p>
+          <a:p>
+            <a:pPr lvl="1"/>
+            <a:r>
+              <a:rPr lang="en-US" altLang="zh-CN" dirty="0"/>
+              <a:t>Solution</a:t>
+            </a:r>
+            <a:r>
+              <a:rPr lang="zh-CN" altLang="en-US" dirty="0"/>
+              <a:t>配置：</a:t>
+            </a:r>
+            <a:r>
+              <a:rPr lang="en-US" altLang="zh-CN" dirty="0" err="1"/>
+              <a:t>Config.h</a:t>
+            </a:r>
+            <a:endParaRPr lang="en-US" altLang="zh-CN" dirty="0"/>
+          </a:p>
+          <a:p>
+            <a:pPr lvl="1"/>
+            <a:r>
+              <a:rPr lang="zh-CN" altLang="en-US" dirty="0"/>
+              <a:t>部分测试指标：</a:t>
+            </a:r>
+            <a:r>
+              <a:rPr lang="en-US" altLang="zh-CN" dirty="0" err="1"/>
+              <a:t>Metrics,h</a:t>
+            </a:r>
+            <a:endParaRPr lang="en-US" altLang="zh-CN" dirty="0"/>
+          </a:p>
+        </p:txBody>
+      </p:sp>
+    </p:spTree>
+    <p:extLst>
+      <p:ext uri="{BB962C8B-B14F-4D97-AF65-F5344CB8AC3E}">
+        <p14:creationId xmlns:p14="http://schemas.microsoft.com/office/powerpoint/2010/main" val="3997466391"/>
+      </p:ext>
+    </p:extLst>
+  </p:cSld>
+  <p:clrMapOvr>
+    <a:masterClrMapping/>
+  </p:clrMapOvr>
+  <mc:AlternateContent xmlns:mc="http://schemas.openxmlformats.org/markup-compatibility/2006">
+    <mc:Choice xmlns:p159="http://schemas.microsoft.com/office/powerpoint/2015/09/main" Requires="p159">
+      <p:transition spd="med">
+        <p159:morph option="byWord"/>
+      </p:transition>
+    </mc:Choice>
+    <mc:Fallback>
+      <p:transition spd="med">
+        <p:fade/>
+      </p:transition>
+    </mc:Fallback>
+  </mc:AlternateContent>
+</p:sld>
+</file>
+
+<file path=ppt/slides/slide6.xml><?xml version="1.0" encoding="utf-8"?>
+<p:sld xmlns:a="http://schemas.openxmlformats.org/drawingml/2006/main" xmlns:r="http://schemas.openxmlformats.org/officeDocument/2006/relationships" xmlns:p="http://schemas.openxmlformats.org/presentationml/2006/main">
+  <p:cSld>
+    <p:spTree>
+      <p:nvGrpSpPr>
+        <p:cNvPr id="1" name=""/>
+        <p:cNvGrpSpPr/>
+        <p:nvPr/>
+      </p:nvGrpSpPr>
+      <p:grpSpPr>
+        <a:xfrm>
+          <a:off x="0" y="0"/>
+          <a:ext cx="0" cy="0"/>
+          <a:chOff x="0" y="0"/>
+          <a:chExt cx="0" cy="0"/>
+        </a:xfrm>
+      </p:grpSpPr>
+      <p:sp>
+        <p:nvSpPr>
+          <p:cNvPr id="2" name="!!2">
+            <a:extLst>
+              <a:ext uri="{FF2B5EF4-FFF2-40B4-BE49-F238E27FC236}">
+                <a16:creationId xmlns:a16="http://schemas.microsoft.com/office/drawing/2014/main" id="{C341D883-0311-F2DA-A48F-7C19726F7154}"/>
+              </a:ext>
+            </a:extLst>
+          </p:cNvPr>
+          <p:cNvSpPr>
+            <a:spLocks noGrp="1"/>
+          </p:cNvSpPr>
+          <p:nvPr>
+            <p:ph type="title"/>
+          </p:nvPr>
+        </p:nvSpPr>
+        <p:spPr/>
+        <p:txBody>
+          <a:bodyPr/>
+          <a:lstStyle/>
+          <a:p>
+            <a:r>
+              <a:rPr lang="zh-CN" altLang="en-US" b="1" dirty="0"/>
               <a:t>核心算法：</a:t>
             </a:r>
             <a:r>
-              <a:rPr lang="en-US" altLang="zh-CN" dirty="0"/>
+              <a:rPr lang="en-US" altLang="zh-CN" b="1" dirty="0"/>
               <a:t>HNSW</a:t>
             </a:r>
-            <a:endParaRPr lang="zh-CN" altLang="en-US" dirty="0"/>
-          </a:p>
-        </p:txBody>
-      </p:sp>
-      <mc:AlternateContent xmlns:mc="http://schemas.openxmlformats.org/markup-compatibility/2006" xmlns:a14="http://schemas.microsoft.com/office/drawing/2010/main">
-        <mc:Choice Requires="a14">
+            <a:endParaRPr lang="zh-CN" altLang="en-US" b="1" dirty="0"/>
+          </a:p>
+        </p:txBody>
+      </p:sp>
+      <mc:AlternateContent xmlns:mc="http://schemas.openxmlformats.org/markup-compatibility/2006">
+        <mc:Choice xmlns:a14="http://schemas.microsoft.com/office/drawing/2010/main" Requires="a14">
           <p:sp>
             <p:nvSpPr>
-              <p:cNvPr id="3" name="内容占位符 2">
+              <p:cNvPr id="3" name="!!3">
                 <a:extLst>
                   <a:ext uri="{FF2B5EF4-FFF2-40B4-BE49-F238E27FC236}">
                     <a16:creationId xmlns:a16="http://schemas.microsoft.com/office/drawing/2014/main" id="{4F8432F1-BA46-001E-1C78-469F44FC1853}"/>
@@ -4954,8 +6683,12 @@
               <a:p>
                 <a:pPr lvl="1"/>
                 <a:r>
+                  <a:rPr lang="zh-CN" altLang="en-US" b="1" dirty="0"/>
+                  <a:t>实际搜索复杂度</a:t>
+                </a:r>
+                <a:r>
                   <a:rPr lang="zh-CN" altLang="en-US" dirty="0"/>
-                  <a:t>实际搜索复杂度：</a:t>
+                  <a:t>：</a:t>
                 </a:r>
                 <a14:m>
                   <m:oMath xmlns:m="http://schemas.openxmlformats.org/officeDocument/2006/math">
@@ -5156,10 +6889,10 @@
             </p:txBody>
           </p:sp>
         </mc:Choice>
-        <mc:Fallback xmlns="">
+        <mc:Fallback>
           <p:sp>
             <p:nvSpPr>
-              <p:cNvPr id="3" name="内容占位符 2">
+              <p:cNvPr id="3" name="!!3">
                 <a:extLst>
                   <a:ext uri="{FF2B5EF4-FFF2-40B4-BE49-F238E27FC236}">
                     <a16:creationId xmlns:a16="http://schemas.microsoft.com/office/drawing/2014/main" id="{4F8432F1-BA46-001E-1C78-469F44FC1853}"/>
@@ -5206,260 +6939,18 @@
   <p:clrMapOvr>
     <a:masterClrMapping/>
   </p:clrMapOvr>
-</p:sld>
-</file>
-
-<file path=ppt/slides/slide5.xml><?xml version="1.0" encoding="utf-8"?>
-<p:sld xmlns:a="http://schemas.openxmlformats.org/drawingml/2006/main" xmlns:r="http://schemas.openxmlformats.org/officeDocument/2006/relationships" xmlns:p="http://schemas.openxmlformats.org/presentationml/2006/main">
-  <p:cSld>
-    <p:spTree>
-      <p:nvGrpSpPr>
-        <p:cNvPr id="1" name=""/>
-        <p:cNvGrpSpPr/>
-        <p:nvPr/>
-      </p:nvGrpSpPr>
-      <p:grpSpPr>
-        <a:xfrm>
-          <a:off x="0" y="0"/>
-          <a:ext cx="0" cy="0"/>
-          <a:chOff x="0" y="0"/>
-          <a:chExt cx="0" cy="0"/>
-        </a:xfrm>
-      </p:grpSpPr>
-      <p:sp>
-        <p:nvSpPr>
-          <p:cNvPr id="2" name="标题 1">
-            <a:extLst>
-              <a:ext uri="{FF2B5EF4-FFF2-40B4-BE49-F238E27FC236}">
-                <a16:creationId xmlns:a16="http://schemas.microsoft.com/office/drawing/2014/main" id="{4CC26DD4-93C5-F2D5-69D4-E6F7260F1939}"/>
-              </a:ext>
-            </a:extLst>
-          </p:cNvPr>
-          <p:cNvSpPr>
-            <a:spLocks noGrp="1"/>
-          </p:cNvSpPr>
-          <p:nvPr>
-            <p:ph type="title"/>
-          </p:nvPr>
-        </p:nvSpPr>
-        <p:spPr/>
-        <p:txBody>
-          <a:bodyPr/>
-          <a:lstStyle/>
-          <a:p>
-            <a:r>
-              <a:rPr lang="zh-CN" altLang="en-US" dirty="0"/>
-              <a:t>全局工程优化</a:t>
-            </a:r>
-          </a:p>
-        </p:txBody>
-      </p:sp>
-      <p:sp>
-        <p:nvSpPr>
-          <p:cNvPr id="3" name="内容占位符 2">
-            <a:extLst>
-              <a:ext uri="{FF2B5EF4-FFF2-40B4-BE49-F238E27FC236}">
-                <a16:creationId xmlns:a16="http://schemas.microsoft.com/office/drawing/2014/main" id="{CCDF5797-0E35-5D30-0F79-C90252C84E79}"/>
-              </a:ext>
-            </a:extLst>
-          </p:cNvPr>
-          <p:cNvSpPr>
-            <a:spLocks noGrp="1"/>
-          </p:cNvSpPr>
-          <p:nvPr>
-            <p:ph idx="1"/>
-          </p:nvPr>
-        </p:nvSpPr>
-        <p:spPr/>
-        <p:txBody>
-          <a:bodyPr/>
-          <a:lstStyle/>
-          <a:p>
-            <a:r>
-              <a:rPr lang="en-US" altLang="zh-CN" dirty="0"/>
-              <a:t>SIMD</a:t>
-            </a:r>
-            <a:r>
-              <a:rPr lang="zh-CN" altLang="en-US" dirty="0"/>
-              <a:t>指令集加速</a:t>
-            </a:r>
-            <a:endParaRPr lang="en-US" altLang="zh-CN" dirty="0"/>
-          </a:p>
-          <a:p>
-            <a:r>
-              <a:rPr lang="zh-CN" altLang="en-US" dirty="0"/>
-              <a:t>图存储扁平化</a:t>
-            </a:r>
-            <a:endParaRPr lang="en-US" altLang="zh-CN" dirty="0"/>
-          </a:p>
-          <a:p>
-            <a:r>
-              <a:rPr lang="zh-CN" altLang="en-US" dirty="0"/>
-              <a:t>内存预取：图导航过程中预取邻居节点的数据</a:t>
-            </a:r>
-            <a:endParaRPr lang="en-US" altLang="zh-CN" dirty="0"/>
-          </a:p>
-          <a:p>
-            <a:r>
-              <a:rPr lang="zh-CN" altLang="en-US" dirty="0"/>
-              <a:t>多线程建图</a:t>
-            </a:r>
-            <a:endParaRPr lang="en-US" altLang="zh-CN" dirty="0"/>
-          </a:p>
-          <a:p>
-            <a:r>
-              <a:rPr lang="zh-CN" altLang="en-US" dirty="0"/>
-              <a:t>启发式剪枝：基于</a:t>
-            </a:r>
-            <a:r>
-              <a:rPr lang="en-US" altLang="zh-CN" dirty="0"/>
-              <a:t>RNG</a:t>
-            </a:r>
-            <a:r>
-              <a:rPr lang="zh-CN" altLang="en-US" dirty="0"/>
-              <a:t>的建图中剪枝</a:t>
-            </a:r>
-            <a:endParaRPr lang="en-US" altLang="zh-CN" dirty="0"/>
-          </a:p>
-        </p:txBody>
-      </p:sp>
-    </p:spTree>
-    <p:extLst>
-      <p:ext uri="{BB962C8B-B14F-4D97-AF65-F5344CB8AC3E}">
-        <p14:creationId xmlns:p14="http://schemas.microsoft.com/office/powerpoint/2010/main" val="2311772854"/>
-      </p:ext>
-    </p:extLst>
-  </p:cSld>
-  <p:clrMapOvr>
-    <a:masterClrMapping/>
-  </p:clrMapOvr>
-</p:sld>
-</file>
-
-<file path=ppt/slides/slide6.xml><?xml version="1.0" encoding="utf-8"?>
-<p:sld xmlns:a="http://schemas.openxmlformats.org/drawingml/2006/main" xmlns:r="http://schemas.openxmlformats.org/officeDocument/2006/relationships" xmlns:p="http://schemas.openxmlformats.org/presentationml/2006/main">
-  <p:cSld>
-    <p:spTree>
-      <p:nvGrpSpPr>
-        <p:cNvPr id="1" name=""/>
-        <p:cNvGrpSpPr/>
-        <p:nvPr/>
-      </p:nvGrpSpPr>
-      <p:grpSpPr>
-        <a:xfrm>
-          <a:off x="0" y="0"/>
-          <a:ext cx="0" cy="0"/>
-          <a:chOff x="0" y="0"/>
-          <a:chExt cx="0" cy="0"/>
-        </a:xfrm>
-      </p:grpSpPr>
-      <p:sp>
-        <p:nvSpPr>
-          <p:cNvPr id="2" name="标题 1">
-            <a:extLst>
-              <a:ext uri="{FF2B5EF4-FFF2-40B4-BE49-F238E27FC236}">
-                <a16:creationId xmlns:a16="http://schemas.microsoft.com/office/drawing/2014/main" id="{B1F26C06-F0D4-5FE0-D48F-FDE09896F42C}"/>
-              </a:ext>
-            </a:extLst>
-          </p:cNvPr>
-          <p:cNvSpPr>
-            <a:spLocks noGrp="1"/>
-          </p:cNvSpPr>
-          <p:nvPr>
-            <p:ph type="title"/>
-          </p:nvPr>
-        </p:nvSpPr>
-        <p:spPr/>
-        <p:txBody>
-          <a:bodyPr/>
-          <a:lstStyle/>
-          <a:p>
-            <a:r>
-              <a:rPr lang="zh-CN" altLang="en-US" dirty="0"/>
-              <a:t>有效优化策略：适应性</a:t>
-            </a:r>
-            <a:r>
-              <a:rPr lang="en-US" altLang="zh-CN" dirty="0"/>
-              <a:t>Beam Search</a:t>
-            </a:r>
-            <a:endParaRPr lang="zh-CN" altLang="en-US" dirty="0"/>
-          </a:p>
-        </p:txBody>
-      </p:sp>
-      <p:sp>
-        <p:nvSpPr>
-          <p:cNvPr id="3" name="内容占位符 2">
-            <a:extLst>
-              <a:ext uri="{FF2B5EF4-FFF2-40B4-BE49-F238E27FC236}">
-                <a16:creationId xmlns:a16="http://schemas.microsoft.com/office/drawing/2014/main" id="{30196CF7-D5DA-3BCB-878F-217DB115AFB3}"/>
-              </a:ext>
-            </a:extLst>
-          </p:cNvPr>
-          <p:cNvSpPr>
-            <a:spLocks noGrp="1"/>
-          </p:cNvSpPr>
-          <p:nvPr>
-            <p:ph idx="1"/>
-          </p:nvPr>
-        </p:nvSpPr>
-        <p:spPr/>
-        <p:txBody>
-          <a:bodyPr/>
-          <a:lstStyle/>
-          <a:p>
-            <a:r>
-              <a:rPr lang="zh-CN" altLang="en-US" dirty="0"/>
-              <a:t>引入动态早停机制，不完全以来固定的</a:t>
-            </a:r>
-            <a:r>
-              <a:rPr lang="en-US" altLang="zh-CN" dirty="0" err="1"/>
-              <a:t>EfSearch</a:t>
-            </a:r>
-            <a:r>
-              <a:rPr lang="zh-CN" altLang="en-US" dirty="0"/>
-              <a:t>参数，当前</a:t>
-            </a:r>
-            <a:r>
-              <a:rPr lang="en-US" altLang="zh-CN" dirty="0"/>
-              <a:t>10</a:t>
-            </a:r>
-            <a:r>
-              <a:rPr lang="zh-CN" altLang="en-US" dirty="0"/>
-              <a:t>个候选点经过一定循环次数都没有变化时直接返回这</a:t>
-            </a:r>
-            <a:r>
-              <a:rPr lang="en-US" altLang="zh-CN" dirty="0"/>
-              <a:t>10</a:t>
-            </a:r>
-            <a:r>
-              <a:rPr lang="zh-CN" altLang="en-US" dirty="0"/>
-              <a:t>个后选点。</a:t>
-            </a:r>
-            <a:endParaRPr lang="en-US" altLang="zh-CN" dirty="0"/>
-          </a:p>
-          <a:p>
-            <a:r>
-              <a:rPr lang="zh-CN" altLang="en-US" dirty="0"/>
-              <a:t>搜索延时提升</a:t>
-            </a:r>
-            <a:r>
-              <a:rPr lang="en-US" altLang="zh-CN"/>
-              <a:t>~10%</a:t>
-            </a:r>
-            <a:endParaRPr lang="zh-CN" altLang="en-US" dirty="0"/>
-          </a:p>
-        </p:txBody>
-      </p:sp>
-    </p:spTree>
-    <p:extLst>
-      <p:ext uri="{BB962C8B-B14F-4D97-AF65-F5344CB8AC3E}">
-        <p14:creationId xmlns:p14="http://schemas.microsoft.com/office/powerpoint/2010/main" val="26189235"/>
-      </p:ext>
-    </p:extLst>
-  </p:cSld>
-  <p:clrMapOvr>
-    <a:masterClrMapping/>
-  </p:clrMapOvr>
+  <mc:AlternateContent xmlns:mc="http://schemas.openxmlformats.org/markup-compatibility/2006">
+    <mc:Choice xmlns:p159="http://schemas.microsoft.com/office/powerpoint/2015/09/main" Requires="p159">
+      <p:transition spd="med">
+        <p159:morph option="byWord"/>
+      </p:transition>
+    </mc:Choice>
+    <mc:Fallback>
+      <p:transition spd="med">
+        <p:fade/>
+      </p:transition>
+    </mc:Fallback>
+  </mc:AlternateContent>
 </p:sld>
 </file>
 
@@ -5482,10 +6973,10 @@
       </p:grpSpPr>
       <p:sp>
         <p:nvSpPr>
-          <p:cNvPr id="2" name="标题 1">
-            <a:extLst>
-              <a:ext uri="{FF2B5EF4-FFF2-40B4-BE49-F238E27FC236}">
-                <a16:creationId xmlns:a16="http://schemas.microsoft.com/office/drawing/2014/main" id="{48899C13-3942-DDEE-9034-D2ECE98736DE}"/>
+          <p:cNvPr id="2" name="!!1">
+            <a:extLst>
+              <a:ext uri="{FF2B5EF4-FFF2-40B4-BE49-F238E27FC236}">
+                <a16:creationId xmlns:a16="http://schemas.microsoft.com/office/drawing/2014/main" id="{50FF70C9-E37E-6504-90E4-3E10289B85BC}"/>
               </a:ext>
             </a:extLst>
           </p:cNvPr>
@@ -5502,94 +6993,34 @@
           <a:lstStyle/>
           <a:p>
             <a:r>
-              <a:rPr lang="zh-CN" altLang="en-US" dirty="0"/>
-              <a:t>有效优化策略：</a:t>
-            </a:r>
-            <a:r>
-              <a:rPr lang="en-US" altLang="zh-CN" dirty="0"/>
-              <a:t>std::</a:t>
-            </a:r>
-            <a:r>
-              <a:rPr lang="en-US" altLang="zh-CN" dirty="0" err="1"/>
-              <a:t>pmr</a:t>
-            </a:r>
-            <a:r>
-              <a:rPr lang="zh-CN" altLang="en-US" dirty="0"/>
-              <a:t>内存布局优化</a:t>
-            </a:r>
-          </a:p>
-        </p:txBody>
-      </p:sp>
-      <p:sp>
-        <p:nvSpPr>
-          <p:cNvPr id="3" name="内容占位符 2">
-            <a:extLst>
-              <a:ext uri="{FF2B5EF4-FFF2-40B4-BE49-F238E27FC236}">
-                <a16:creationId xmlns:a16="http://schemas.microsoft.com/office/drawing/2014/main" id="{36FA0ED1-BC9A-A150-3E93-56B0867FF8B2}"/>
-              </a:ext>
-            </a:extLst>
-          </p:cNvPr>
-          <p:cNvSpPr>
-            <a:spLocks noGrp="1"/>
-          </p:cNvSpPr>
-          <p:nvPr>
-            <p:ph idx="1"/>
-          </p:nvPr>
-        </p:nvSpPr>
-        <p:spPr/>
-        <p:txBody>
-          <a:bodyPr/>
-          <a:lstStyle/>
-          <a:p>
-            <a:r>
-              <a:rPr lang="zh-CN" altLang="en-US" dirty="0"/>
-              <a:t>使用</a:t>
-            </a:r>
-            <a:r>
-              <a:rPr lang="en-US" altLang="zh-CN" dirty="0"/>
-              <a:t>std::</a:t>
-            </a:r>
-            <a:r>
-              <a:rPr lang="en-US" altLang="zh-CN" dirty="0" err="1"/>
-              <a:t>pmr</a:t>
-            </a:r>
-            <a:r>
-              <a:rPr lang="en-US" altLang="zh-CN" dirty="0"/>
-              <a:t>::</a:t>
-            </a:r>
-            <a:r>
-              <a:rPr lang="en-US" altLang="zh-CN" dirty="0" err="1"/>
-              <a:t>synchronized_pool_resource</a:t>
-            </a:r>
-            <a:r>
-              <a:rPr lang="zh-CN" altLang="en-US" dirty="0"/>
-              <a:t>替代默认的系统堆内存分配，提高申请内存速度和内存局部性。</a:t>
-            </a:r>
-            <a:endParaRPr lang="en-US" altLang="zh-CN" dirty="0"/>
-          </a:p>
-          <a:p>
-            <a:r>
-              <a:rPr lang="zh-CN" altLang="en-US" dirty="0"/>
-              <a:t>总体搜索延时提升</a:t>
-            </a:r>
-            <a:r>
-              <a:rPr lang="en-US" altLang="zh-CN" dirty="0"/>
-              <a:t>30%</a:t>
-            </a:r>
-            <a:endParaRPr lang="zh-CN" altLang="en-US" dirty="0"/>
+              <a:rPr lang="zh-CN" altLang="en-US" b="1" dirty="0"/>
+              <a:t>全局工程优化</a:t>
+            </a:r>
           </a:p>
         </p:txBody>
       </p:sp>
     </p:spTree>
     <p:extLst>
       <p:ext uri="{BB962C8B-B14F-4D97-AF65-F5344CB8AC3E}">
-        <p14:creationId xmlns:p14="http://schemas.microsoft.com/office/powerpoint/2010/main" val="957927078"/>
+        <p14:creationId xmlns:p14="http://schemas.microsoft.com/office/powerpoint/2010/main" val="3851890004"/>
       </p:ext>
     </p:extLst>
   </p:cSld>
   <p:clrMapOvr>
     <a:masterClrMapping/>
   </p:clrMapOvr>
+  <mc:AlternateContent xmlns:mc="http://schemas.openxmlformats.org/markup-compatibility/2006">
+    <mc:Choice xmlns:p159="http://schemas.microsoft.com/office/powerpoint/2015/09/main" Requires="p159">
+      <p:transition spd="med">
+        <p159:morph option="byObject"/>
+      </p:transition>
+    </mc:Choice>
+    <mc:Fallback>
+      <p:transition spd="med">
+        <p:fade/>
+      </p:transition>
+    </mc:Fallback>
+  </mc:AlternateContent>
 </p:sld>
 </file>
 
@@ -5612,10 +7043,10 @@
       </p:grpSpPr>
       <p:sp>
         <p:nvSpPr>
-          <p:cNvPr id="2" name="标题 1">
-            <a:extLst>
-              <a:ext uri="{FF2B5EF4-FFF2-40B4-BE49-F238E27FC236}">
-                <a16:creationId xmlns:a16="http://schemas.microsoft.com/office/drawing/2014/main" id="{BA09528C-337C-E805-A4DB-C02A3026B1A5}"/>
+          <p:cNvPr id="2" name="!!1">
+            <a:extLst>
+              <a:ext uri="{FF2B5EF4-FFF2-40B4-BE49-F238E27FC236}">
+                <a16:creationId xmlns:a16="http://schemas.microsoft.com/office/drawing/2014/main" id="{4CC26DD4-93C5-F2D5-69D4-E6F7260F1939}"/>
               </a:ext>
             </a:extLst>
           </p:cNvPr>
@@ -5632,32 +7063,8 @@
           <a:lstStyle/>
           <a:p>
             <a:r>
-              <a:rPr lang="zh-CN" altLang="en-US" dirty="0"/>
-              <a:t>无效或负面优化：量化（</a:t>
-            </a:r>
-            <a:r>
-              <a:rPr lang="en-US" altLang="zh-CN" dirty="0"/>
-              <a:t>PQ</a:t>
-            </a:r>
-            <a:r>
-              <a:rPr lang="zh-CN" altLang="en-US" dirty="0"/>
-              <a:t>，</a:t>
-            </a:r>
-            <a:r>
-              <a:rPr lang="en-US" altLang="zh-CN" dirty="0"/>
-              <a:t>OPQ</a:t>
-            </a:r>
-            <a:r>
-              <a:rPr lang="zh-CN" altLang="en-US" dirty="0"/>
-              <a:t>，</a:t>
-            </a:r>
-            <a:r>
-              <a:rPr lang="en-US" altLang="zh-CN" dirty="0"/>
-              <a:t>SQ</a:t>
-            </a:r>
-            <a:r>
-              <a:rPr lang="zh-CN" altLang="en-US" dirty="0"/>
-              <a:t>）</a:t>
+              <a:rPr lang="zh-CN" altLang="en-US" b="1" dirty="0"/>
+              <a:t>全局工程优化</a:t>
             </a:r>
           </a:p>
         </p:txBody>
@@ -5667,7 +7074,7 @@
           <p:cNvPr id="3" name="内容占位符 2">
             <a:extLst>
               <a:ext uri="{FF2B5EF4-FFF2-40B4-BE49-F238E27FC236}">
-                <a16:creationId xmlns:a16="http://schemas.microsoft.com/office/drawing/2014/main" id="{2723A2E7-A0EA-CCB9-72D4-6BD6B3C4C70A}"/>
+                <a16:creationId xmlns:a16="http://schemas.microsoft.com/office/drawing/2014/main" id="{CCDF5797-0E35-5D30-0F79-C90252C84E79}"/>
               </a:ext>
             </a:extLst>
           </p:cNvPr>
@@ -5685,109 +7092,58 @@
           <a:p>
             <a:r>
               <a:rPr lang="en-US" altLang="zh-CN" dirty="0"/>
-              <a:t>PQ</a:t>
-            </a:r>
-            <a:r>
-              <a:rPr lang="zh-CN" altLang="en-US" dirty="0"/>
-              <a:t>和</a:t>
+              <a:t>SIMD</a:t>
+            </a:r>
+            <a:r>
+              <a:rPr lang="zh-CN" altLang="en-US" dirty="0"/>
+              <a:t>指令集加速</a:t>
+            </a:r>
+            <a:endParaRPr lang="en-US" altLang="zh-CN" dirty="0"/>
+          </a:p>
+          <a:p>
+            <a:r>
+              <a:rPr lang="zh-CN" altLang="en-US" dirty="0"/>
+              <a:t>图存储扁平化</a:t>
             </a:r>
             <a:r>
               <a:rPr lang="en-US" altLang="zh-CN" dirty="0"/>
-              <a:t>OPQ</a:t>
-            </a:r>
-            <a:r>
-              <a:rPr lang="zh-CN" altLang="en-US" dirty="0"/>
-              <a:t>优化即使增加</a:t>
-            </a:r>
-            <a:r>
-              <a:rPr lang="en-US" altLang="zh-CN" dirty="0" err="1"/>
-              <a:t>rerank</a:t>
-            </a:r>
-            <a:r>
-              <a:rPr lang="zh-CN" altLang="en-US" dirty="0"/>
-              <a:t>步骤都使搜索精度大幅下降。</a:t>
+              <a:t>	vector&lt;vector&lt;Node&gt;&gt; </a:t>
+            </a:r>
+            <a:r>
+              <a:rPr lang="zh-CN" altLang="en-US" dirty="0"/>
+              <a:t>→ </a:t>
+            </a:r>
+            <a:r>
+              <a:rPr lang="en-US" altLang="zh-CN" dirty="0"/>
+              <a:t>vector&lt;Node&gt;</a:t>
+            </a:r>
+          </a:p>
+          <a:p>
+            <a:r>
+              <a:rPr lang="zh-CN" altLang="en-US" dirty="0"/>
+              <a:t>内存预取：图导航过程中预取邻居节点的数据</a:t>
             </a:r>
             <a:endParaRPr lang="en-US" altLang="zh-CN" dirty="0"/>
           </a:p>
           <a:p>
-            <a:pPr lvl="1"/>
-            <a:r>
-              <a:rPr lang="zh-CN" altLang="en-US" dirty="0"/>
-              <a:t>根据</a:t>
+            <a:r>
+              <a:rPr lang="zh-CN" altLang="en-US" dirty="0"/>
+              <a:t>多线程建图</a:t>
+            </a:r>
+            <a:endParaRPr lang="en-US" altLang="zh-CN" dirty="0"/>
+          </a:p>
+          <a:p>
+            <a:r>
+              <a:rPr lang="zh-CN" altLang="en-US" dirty="0"/>
+              <a:t>启发式剪枝：基于</a:t>
             </a:r>
             <a:r>
               <a:rPr lang="en-US" altLang="zh-CN" dirty="0"/>
-              <a:t>Johnson-</a:t>
-            </a:r>
-            <a:r>
-              <a:rPr lang="en-US" altLang="zh-CN" dirty="0" err="1"/>
-              <a:t>Lindenstrauss</a:t>
-            </a:r>
-            <a:r>
-              <a:rPr lang="zh-CN" altLang="en-US" dirty="0"/>
-              <a:t>引理可以计算得所有维度压缩得量化方法在</a:t>
-            </a:r>
-            <a:r>
-              <a:rPr lang="en-US" altLang="zh-CN" dirty="0"/>
-              <a:t>SIFT-1m</a:t>
-            </a:r>
-            <a:r>
-              <a:rPr lang="zh-CN" altLang="en-US" dirty="0"/>
-              <a:t>和</a:t>
-            </a:r>
-            <a:r>
-              <a:rPr lang="en-US" altLang="zh-CN" dirty="0" err="1"/>
-              <a:t>GloVe</a:t>
-            </a:r>
-            <a:r>
-              <a:rPr lang="zh-CN" altLang="en-US" dirty="0"/>
-              <a:t>数据集上有损失上界</a:t>
-            </a:r>
-            <a:r>
-              <a:rPr lang="en-US" altLang="zh-CN" dirty="0"/>
-              <a:t>92%</a:t>
-            </a:r>
-            <a:r>
-              <a:rPr lang="zh-CN" altLang="en-US" dirty="0"/>
-              <a:t>和</a:t>
-            </a:r>
-            <a:r>
-              <a:rPr lang="en-US" altLang="zh-CN" dirty="0"/>
-              <a:t>106%</a:t>
-            </a:r>
-            <a:r>
-              <a:rPr lang="zh-CN" altLang="en-US" dirty="0"/>
-              <a:t>。</a:t>
-            </a:r>
-            <a:endParaRPr lang="en-US" altLang="zh-CN" dirty="0"/>
-          </a:p>
-          <a:p>
-            <a:pPr lvl="1"/>
-            <a:r>
-              <a:rPr lang="zh-CN" altLang="en-US" dirty="0"/>
-              <a:t>搜索性能损失</a:t>
-            </a:r>
-            <a:r>
-              <a:rPr lang="en-US" altLang="zh-CN" dirty="0"/>
-              <a:t>~40%</a:t>
-            </a:r>
-          </a:p>
-          <a:p>
-            <a:r>
-              <a:rPr lang="en-US" altLang="zh-CN" dirty="0"/>
-              <a:t>SQ16</a:t>
-            </a:r>
-            <a:r>
-              <a:rPr lang="zh-CN" altLang="en-US" dirty="0"/>
-              <a:t>量化对搜索精度没有显著影响，延时增加</a:t>
-            </a:r>
-            <a:r>
-              <a:rPr lang="en-US" altLang="zh-CN" dirty="0"/>
-              <a:t>~200%</a:t>
-            </a:r>
-            <a:r>
-              <a:rPr lang="zh-CN" altLang="en-US" dirty="0"/>
-              <a:t>。</a:t>
+              <a:t>RNG</a:t>
+            </a:r>
+            <a:r>
+              <a:rPr lang="zh-CN" altLang="en-US" dirty="0"/>
+              <a:t>的建图中剪枝</a:t>
             </a:r>
             <a:endParaRPr lang="en-US" altLang="zh-CN" dirty="0"/>
           </a:p>
@@ -5796,13 +7152,25 @@
     </p:spTree>
     <p:extLst>
       <p:ext uri="{BB962C8B-B14F-4D97-AF65-F5344CB8AC3E}">
-        <p14:creationId xmlns:p14="http://schemas.microsoft.com/office/powerpoint/2010/main" val="2012672098"/>
+        <p14:creationId xmlns:p14="http://schemas.microsoft.com/office/powerpoint/2010/main" val="2311772854"/>
       </p:ext>
     </p:extLst>
   </p:cSld>
   <p:clrMapOvr>
     <a:masterClrMapping/>
   </p:clrMapOvr>
+  <mc:AlternateContent xmlns:mc="http://schemas.openxmlformats.org/markup-compatibility/2006">
+    <mc:Choice xmlns:p159="http://schemas.microsoft.com/office/powerpoint/2015/09/main" Requires="p159">
+      <p:transition spd="med">
+        <p159:morph option="byObject"/>
+      </p:transition>
+    </mc:Choice>
+    <mc:Fallback>
+      <p:transition spd="med">
+        <p:fade/>
+      </p:transition>
+    </mc:Fallback>
+  </mc:AlternateContent>
 </p:sld>
 </file>
 
@@ -5825,10 +7193,10 @@
       </p:grpSpPr>
       <p:sp>
         <p:nvSpPr>
-          <p:cNvPr id="2" name="标题 1">
-            <a:extLst>
-              <a:ext uri="{FF2B5EF4-FFF2-40B4-BE49-F238E27FC236}">
-                <a16:creationId xmlns:a16="http://schemas.microsoft.com/office/drawing/2014/main" id="{003BA47E-2428-6B64-A107-0E9583CB635A}"/>
+          <p:cNvPr id="2" name="!!1">
+            <a:extLst>
+              <a:ext uri="{FF2B5EF4-FFF2-40B4-BE49-F238E27FC236}">
+                <a16:creationId xmlns:a16="http://schemas.microsoft.com/office/drawing/2014/main" id="{CBDD1339-0D75-D473-807D-ECEF105DFF5B}"/>
               </a:ext>
             </a:extLst>
           </p:cNvPr>
@@ -5839,96 +7207,289 @@
             <p:ph type="title"/>
           </p:nvPr>
         </p:nvSpPr>
-        <p:spPr/>
+        <p:spPr>
+          <a:xfrm>
+            <a:off x="831850" y="3519055"/>
+            <a:ext cx="10515600" cy="1043420"/>
+          </a:xfrm>
+        </p:spPr>
         <p:txBody>
           <a:bodyPr/>
           <a:lstStyle/>
           <a:p>
             <a:r>
-              <a:rPr lang="zh-CN" altLang="en-US" dirty="0"/>
-              <a:t>无效或负面优化：倒排文件索引</a:t>
-            </a:r>
-          </a:p>
-        </p:txBody>
-      </p:sp>
-      <p:sp>
-        <p:nvSpPr>
-          <p:cNvPr id="3" name="内容占位符 2">
-            <a:extLst>
-              <a:ext uri="{FF2B5EF4-FFF2-40B4-BE49-F238E27FC236}">
-                <a16:creationId xmlns:a16="http://schemas.microsoft.com/office/drawing/2014/main" id="{8A39E644-D98E-69FF-3BC4-A2AF4D602AA0}"/>
-              </a:ext>
-            </a:extLst>
-          </p:cNvPr>
-          <p:cNvSpPr>
-            <a:spLocks noGrp="1"/>
-          </p:cNvSpPr>
-          <p:nvPr>
-            <p:ph idx="1"/>
-          </p:nvPr>
-        </p:nvSpPr>
-        <p:spPr/>
+              <a:rPr lang="zh-CN" altLang="en-US" b="1" dirty="0"/>
+              <a:t>有效优化策略</a:t>
+            </a:r>
+          </a:p>
+        </p:txBody>
+      </p:sp>
+      <p:sp>
+        <p:nvSpPr>
+          <p:cNvPr id="3" name="!!2">
+            <a:extLst>
+              <a:ext uri="{FF2B5EF4-FFF2-40B4-BE49-F238E27FC236}">
+                <a16:creationId xmlns:a16="http://schemas.microsoft.com/office/drawing/2014/main" id="{80001E91-6A38-872F-33D6-3C2ABF61F905}"/>
+              </a:ext>
+            </a:extLst>
+          </p:cNvPr>
+          <p:cNvSpPr>
+            <a:spLocks noGrp="1"/>
+          </p:cNvSpPr>
+          <p:nvPr>
+            <p:ph type="body" idx="1"/>
+          </p:nvPr>
+        </p:nvSpPr>
+        <p:spPr>
+          <a:xfrm>
+            <a:off x="831850" y="4589464"/>
+            <a:ext cx="10515600" cy="457200"/>
+          </a:xfrm>
+        </p:spPr>
         <p:txBody>
           <a:bodyPr/>
           <a:lstStyle/>
           <a:p>
-            <a:r>
-              <a:rPr lang="zh-CN" altLang="en-US" dirty="0"/>
-              <a:t>尝试通过</a:t>
+            <a:pPr marL="342900" indent="-342900">
+              <a:buFont typeface="Arial" panose="020B0604020202020204" pitchFamily="34" charset="0"/>
+              <a:buChar char="•"/>
+            </a:pPr>
+            <a:r>
+              <a:rPr lang="zh-CN" altLang="en-US" dirty="0"/>
+              <a:t>适应性</a:t>
             </a:r>
             <a:r>
               <a:rPr lang="en-US" altLang="zh-CN" dirty="0"/>
-              <a:t>K-Means</a:t>
-            </a:r>
-            <a:r>
-              <a:rPr lang="zh-CN" altLang="en-US" dirty="0"/>
-              <a:t>聚类减少数据集大小，并对候选的簇进行</a:t>
-            </a:r>
+              <a:t>Beam Search</a:t>
+            </a:r>
+          </a:p>
+        </p:txBody>
+      </p:sp>
+      <p:sp>
+        <p:nvSpPr>
+          <p:cNvPr id="4" name="!!2">
+            <a:extLst>
+              <a:ext uri="{FF2B5EF4-FFF2-40B4-BE49-F238E27FC236}">
+                <a16:creationId xmlns:a16="http://schemas.microsoft.com/office/drawing/2014/main" id="{D9152C16-58DE-E09B-7E61-024EB4A7B308}"/>
+              </a:ext>
+            </a:extLst>
+          </p:cNvPr>
+          <p:cNvSpPr txBox="1">
+            <a:spLocks/>
+          </p:cNvSpPr>
+          <p:nvPr/>
+        </p:nvSpPr>
+        <p:spPr>
+          <a:xfrm>
+            <a:off x="831850" y="5046663"/>
+            <a:ext cx="10515600" cy="1500187"/>
+          </a:xfrm>
+          <a:prstGeom prst="rect">
+            <a:avLst/>
+          </a:prstGeom>
+        </p:spPr>
+        <p:txBody>
+          <a:bodyPr vert="horz" lIns="91440" tIns="45720" rIns="91440" bIns="45720" rtlCol="0">
+            <a:normAutofit/>
+          </a:bodyPr>
+          <a:lstStyle>
+            <a:lvl1pPr marL="0" indent="0" algn="l" defTabSz="914400" rtl="0" eaLnBrk="1" latinLnBrk="0" hangingPunct="1">
+              <a:lnSpc>
+                <a:spcPct val="90000"/>
+              </a:lnSpc>
+              <a:spcBef>
+                <a:spcPts val="1000"/>
+              </a:spcBef>
+              <a:buFont typeface="Arial" panose="020B0604020202020204" pitchFamily="34" charset="0"/>
+              <a:buNone/>
+              <a:defRPr sz="2400" kern="1200">
+                <a:solidFill>
+                  <a:schemeClr val="tx1">
+                    <a:tint val="75000"/>
+                  </a:schemeClr>
+                </a:solidFill>
+                <a:latin typeface="+mn-lt"/>
+                <a:ea typeface="+mn-ea"/>
+                <a:cs typeface="+mn-cs"/>
+              </a:defRPr>
+            </a:lvl1pPr>
+            <a:lvl2pPr marL="457200" indent="0" algn="l" defTabSz="914400" rtl="0" eaLnBrk="1" latinLnBrk="0" hangingPunct="1">
+              <a:lnSpc>
+                <a:spcPct val="90000"/>
+              </a:lnSpc>
+              <a:spcBef>
+                <a:spcPts val="500"/>
+              </a:spcBef>
+              <a:buFont typeface="Arial" panose="020B0604020202020204" pitchFamily="34" charset="0"/>
+              <a:buNone/>
+              <a:defRPr sz="2000" kern="1200">
+                <a:solidFill>
+                  <a:schemeClr val="tx1">
+                    <a:tint val="75000"/>
+                  </a:schemeClr>
+                </a:solidFill>
+                <a:latin typeface="+mn-lt"/>
+                <a:ea typeface="+mn-ea"/>
+                <a:cs typeface="+mn-cs"/>
+              </a:defRPr>
+            </a:lvl2pPr>
+            <a:lvl3pPr marL="914400" indent="0" algn="l" defTabSz="914400" rtl="0" eaLnBrk="1" latinLnBrk="0" hangingPunct="1">
+              <a:lnSpc>
+                <a:spcPct val="90000"/>
+              </a:lnSpc>
+              <a:spcBef>
+                <a:spcPts val="500"/>
+              </a:spcBef>
+              <a:buFont typeface="Arial" panose="020B0604020202020204" pitchFamily="34" charset="0"/>
+              <a:buNone/>
+              <a:defRPr sz="1800" kern="1200">
+                <a:solidFill>
+                  <a:schemeClr val="tx1">
+                    <a:tint val="75000"/>
+                  </a:schemeClr>
+                </a:solidFill>
+                <a:latin typeface="+mn-lt"/>
+                <a:ea typeface="+mn-ea"/>
+                <a:cs typeface="+mn-cs"/>
+              </a:defRPr>
+            </a:lvl3pPr>
+            <a:lvl4pPr marL="1371600" indent="0" algn="l" defTabSz="914400" rtl="0" eaLnBrk="1" latinLnBrk="0" hangingPunct="1">
+              <a:lnSpc>
+                <a:spcPct val="90000"/>
+              </a:lnSpc>
+              <a:spcBef>
+                <a:spcPts val="500"/>
+              </a:spcBef>
+              <a:buFont typeface="Arial" panose="020B0604020202020204" pitchFamily="34" charset="0"/>
+              <a:buNone/>
+              <a:defRPr sz="1600" kern="1200">
+                <a:solidFill>
+                  <a:schemeClr val="tx1">
+                    <a:tint val="75000"/>
+                  </a:schemeClr>
+                </a:solidFill>
+                <a:latin typeface="+mn-lt"/>
+                <a:ea typeface="+mn-ea"/>
+                <a:cs typeface="+mn-cs"/>
+              </a:defRPr>
+            </a:lvl4pPr>
+            <a:lvl5pPr marL="1828800" indent="0" algn="l" defTabSz="914400" rtl="0" eaLnBrk="1" latinLnBrk="0" hangingPunct="1">
+              <a:lnSpc>
+                <a:spcPct val="90000"/>
+              </a:lnSpc>
+              <a:spcBef>
+                <a:spcPts val="500"/>
+              </a:spcBef>
+              <a:buFont typeface="Arial" panose="020B0604020202020204" pitchFamily="34" charset="0"/>
+              <a:buNone/>
+              <a:defRPr sz="1600" kern="1200">
+                <a:solidFill>
+                  <a:schemeClr val="tx1">
+                    <a:tint val="75000"/>
+                  </a:schemeClr>
+                </a:solidFill>
+                <a:latin typeface="+mn-lt"/>
+                <a:ea typeface="+mn-ea"/>
+                <a:cs typeface="+mn-cs"/>
+              </a:defRPr>
+            </a:lvl5pPr>
+            <a:lvl6pPr marL="2286000" indent="0" algn="l" defTabSz="914400" rtl="0" eaLnBrk="1" latinLnBrk="0" hangingPunct="1">
+              <a:lnSpc>
+                <a:spcPct val="90000"/>
+              </a:lnSpc>
+              <a:spcBef>
+                <a:spcPts val="500"/>
+              </a:spcBef>
+              <a:buFont typeface="Arial" panose="020B0604020202020204" pitchFamily="34" charset="0"/>
+              <a:buNone/>
+              <a:defRPr sz="1600" kern="1200">
+                <a:solidFill>
+                  <a:schemeClr val="tx1">
+                    <a:tint val="75000"/>
+                  </a:schemeClr>
+                </a:solidFill>
+                <a:latin typeface="+mn-lt"/>
+                <a:ea typeface="+mn-ea"/>
+                <a:cs typeface="+mn-cs"/>
+              </a:defRPr>
+            </a:lvl6pPr>
+            <a:lvl7pPr marL="2743200" indent="0" algn="l" defTabSz="914400" rtl="0" eaLnBrk="1" latinLnBrk="0" hangingPunct="1">
+              <a:lnSpc>
+                <a:spcPct val="90000"/>
+              </a:lnSpc>
+              <a:spcBef>
+                <a:spcPts val="500"/>
+              </a:spcBef>
+              <a:buFont typeface="Arial" panose="020B0604020202020204" pitchFamily="34" charset="0"/>
+              <a:buNone/>
+              <a:defRPr sz="1600" kern="1200">
+                <a:solidFill>
+                  <a:schemeClr val="tx1">
+                    <a:tint val="75000"/>
+                  </a:schemeClr>
+                </a:solidFill>
+                <a:latin typeface="+mn-lt"/>
+                <a:ea typeface="+mn-ea"/>
+                <a:cs typeface="+mn-cs"/>
+              </a:defRPr>
+            </a:lvl7pPr>
+            <a:lvl8pPr marL="3200400" indent="0" algn="l" defTabSz="914400" rtl="0" eaLnBrk="1" latinLnBrk="0" hangingPunct="1">
+              <a:lnSpc>
+                <a:spcPct val="90000"/>
+              </a:lnSpc>
+              <a:spcBef>
+                <a:spcPts val="500"/>
+              </a:spcBef>
+              <a:buFont typeface="Arial" panose="020B0604020202020204" pitchFamily="34" charset="0"/>
+              <a:buNone/>
+              <a:defRPr sz="1600" kern="1200">
+                <a:solidFill>
+                  <a:schemeClr val="tx1">
+                    <a:tint val="75000"/>
+                  </a:schemeClr>
+                </a:solidFill>
+                <a:latin typeface="+mn-lt"/>
+                <a:ea typeface="+mn-ea"/>
+                <a:cs typeface="+mn-cs"/>
+              </a:defRPr>
+            </a:lvl8pPr>
+            <a:lvl9pPr marL="3657600" indent="0" algn="l" defTabSz="914400" rtl="0" eaLnBrk="1" latinLnBrk="0" hangingPunct="1">
+              <a:lnSpc>
+                <a:spcPct val="90000"/>
+              </a:lnSpc>
+              <a:spcBef>
+                <a:spcPts val="500"/>
+              </a:spcBef>
+              <a:buFont typeface="Arial" panose="020B0604020202020204" pitchFamily="34" charset="0"/>
+              <a:buNone/>
+              <a:defRPr sz="1600" kern="1200">
+                <a:solidFill>
+                  <a:schemeClr val="tx1">
+                    <a:tint val="75000"/>
+                  </a:schemeClr>
+                </a:solidFill>
+                <a:latin typeface="+mn-lt"/>
+                <a:ea typeface="+mn-ea"/>
+                <a:cs typeface="+mn-cs"/>
+              </a:defRPr>
+            </a:lvl9pPr>
+          </a:lstStyle>
+          <a:p>
+            <a:pPr marL="342900" indent="-342900">
+              <a:buFont typeface="Arial" panose="020B0604020202020204" pitchFamily="34" charset="0"/>
+              <a:buChar char="•"/>
+            </a:pPr>
             <a:r>
               <a:rPr lang="en-US" altLang="zh-CN" dirty="0"/>
-              <a:t>BF</a:t>
-            </a:r>
-            <a:r>
-              <a:rPr lang="zh-CN" altLang="en-US" dirty="0"/>
-              <a:t>搜索。</a:t>
-            </a:r>
-            <a:endParaRPr lang="en-US" altLang="zh-CN" dirty="0"/>
-          </a:p>
-          <a:p>
-            <a:r>
-              <a:rPr lang="zh-CN" altLang="en-US" dirty="0"/>
-              <a:t>由于</a:t>
-            </a:r>
-            <a:r>
-              <a:rPr lang="en-US" altLang="zh-CN" dirty="0"/>
-              <a:t>SIFT-1m</a:t>
-            </a:r>
-            <a:r>
-              <a:rPr lang="zh-CN" altLang="en-US" dirty="0"/>
-              <a:t>和</a:t>
+              <a:t>std::</a:t>
             </a:r>
             <a:r>
               <a:rPr lang="en-US" altLang="zh-CN" dirty="0" err="1"/>
-              <a:t>GloVe</a:t>
-            </a:r>
-            <a:r>
-              <a:rPr lang="zh-CN" altLang="en-US" dirty="0"/>
-              <a:t>数据集分布比较均匀，难以找到合适的</a:t>
-            </a:r>
-            <a:r>
-              <a:rPr lang="en-US" altLang="zh-CN" dirty="0"/>
-              <a:t>K-Means</a:t>
-            </a:r>
-            <a:r>
-              <a:rPr lang="zh-CN" altLang="en-US" dirty="0"/>
-              <a:t>参数使得对数据集做到很好的聚类。</a:t>
-            </a:r>
-            <a:endParaRPr lang="en-US" altLang="zh-CN" dirty="0"/>
-          </a:p>
-          <a:p>
-            <a:r>
-              <a:rPr lang="zh-CN" altLang="en-US" dirty="0"/>
-              <a:t>尝试使用软聚类的方法，也使性能下降。</a:t>
+              <a:t>pmr</a:t>
+            </a:r>
+            <a:r>
+              <a:rPr lang="zh-CN" altLang="en-US" dirty="0"/>
+              <a:t>内存布局优化</a:t>
             </a:r>
           </a:p>
         </p:txBody>
@@ -5936,13 +7497,16 @@
     </p:spTree>
     <p:extLst>
       <p:ext uri="{BB962C8B-B14F-4D97-AF65-F5344CB8AC3E}">
-        <p14:creationId xmlns:p14="http://schemas.microsoft.com/office/powerpoint/2010/main" val="70153916"/>
+        <p14:creationId xmlns:p14="http://schemas.microsoft.com/office/powerpoint/2010/main" val="919737351"/>
       </p:ext>
     </p:extLst>
   </p:cSld>
   <p:clrMapOvr>
     <a:masterClrMapping/>
   </p:clrMapOvr>
+  <p:transition spd="med">
+    <p:fade/>
+  </p:transition>
 </p:sld>
 </file>
 
